--- a/forsemir-yuangu/01_PPT思路/元谷项目招商运营战略汇报.pptx
+++ b/forsemir-yuangu/01_PPT思路/元谷项目招商运营战略汇报.pptx
@@ -27,6 +27,8 @@
     <p:sldId id="275" r:id="rId26"/>
     <p:sldId id="276" r:id="rId27"/>
     <p:sldId id="277" r:id="rId28"/>
+    <p:sldId id="278" r:id="rId29"/>
+    <p:sldId id="279" r:id="rId30"/>
   </p:sldIdLst>
   <p:sldSz cx="12191695" cy="6858000" type="screen4x3"/>
   <p:notesSz cx="6858000" cy="9144000"/>
@@ -3319,7 +3321,7 @@
               </a:defRPr>
             </a:pPr>
             <a:r>
-              <a:t>P10 楼宇产业地图（1#–6#）</a:t>
+              <a:t>P9b 市场租金对标：大零号湾 / 紫竹高新区 (2024-2025)</a:t>
             </a:r>
           </a:p>
         </p:txBody>
@@ -3359,7 +3361,7 @@
                             <a:srgbClr val="FFFFFF"/>
                           </a:solidFill>
                         </a:rPr>
-                        <a:t>楼栋</a:t>
+                        <a:t>园区 / 项目</a:t>
                       </a:r>
                     </a:p>
                   </a:txBody>
@@ -3380,7 +3382,7 @@
                             <a:srgbClr val="FFFFFF"/>
                           </a:solidFill>
                         </a:rPr>
-                        <a:t>既定功能</a:t>
+                        <a:t>日租金 (元/㎡/天)</a:t>
                       </a:r>
                     </a:p>
                   </a:txBody>
@@ -3401,7 +3403,7 @@
                             <a:srgbClr val="FFFFFF"/>
                           </a:solidFill>
                         </a:rPr>
-                        <a:t>我们的产业增益</a:t>
+                        <a:t>类别</a:t>
                       </a:r>
                     </a:p>
                   </a:txBody>
@@ -3424,7 +3426,7 @@
                             <a:srgbClr val="1F2A44"/>
                           </a:solidFill>
                         </a:rPr>
-                        <a:t>1#</a:t>
+                        <a:t>零号湾全球创新创业集聚区</a:t>
                       </a:r>
                     </a:p>
                   </a:txBody>
@@ -3445,7 +3447,7 @@
                             <a:srgbClr val="1F2A44"/>
                           </a:solidFill>
                         </a:rPr>
-                        <a:t>森马总部 + 1–4F 零售</a:t>
+                        <a:t>2.0–2.5</a:t>
                       </a:r>
                     </a:p>
                   </a:txBody>
@@ -3466,7 +3468,7 @@
                             <a:srgbClr val="1F2A44"/>
                           </a:solidFill>
                         </a:rPr>
-                        <a:t>福布斯榜单 / 国际首发节点</a:t>
+                        <a:t>标杆</a:t>
                       </a:r>
                     </a:p>
                   </a:txBody>
@@ -3489,7 +3491,7 @@
                             <a:srgbClr val="1F2A44"/>
                           </a:solidFill>
                         </a:rPr>
-                        <a:t>2#</a:t>
+                        <a:t>大零号湾科创成果转化中心</a:t>
                       </a:r>
                     </a:p>
                   </a:txBody>
@@ -3510,7 +3512,7 @@
                             <a:srgbClr val="1F2A44"/>
                           </a:solidFill>
                         </a:rPr>
-                        <a:t>二次元 Livehouse / 秀场</a:t>
+                        <a:t>2.0–2.5</a:t>
                       </a:r>
                     </a:p>
                   </a:txBody>
@@ -3531,7 +3533,7 @@
                             <a:srgbClr val="1F2A44"/>
                           </a:solidFill>
                         </a:rPr>
-                        <a:t>科技开放麦 + 潮玩大赛主舞台</a:t>
+                        <a:t>标杆</a:t>
                       </a:r>
                     </a:p>
                   </a:txBody>
@@ -3554,7 +3556,7 @@
                             <a:srgbClr val="1F2A44"/>
                           </a:solidFill>
                         </a:rPr>
-                        <a:t>3#</a:t>
+                        <a:t>华谊万创新所 / 上海人工智能产业园</a:t>
                       </a:r>
                     </a:p>
                   </a:txBody>
@@ -3575,7 +3577,7 @@
                             <a:srgbClr val="1F2A44"/>
                           </a:solidFill>
                         </a:rPr>
-                        <a:t>1–4F 运动+萌宠 / 5F+ 酒店</a:t>
+                        <a:t>2.2</a:t>
                       </a:r>
                     </a:p>
                   </a:txBody>
@@ -3596,7 +3598,7 @@
                             <a:srgbClr val="1F2A44"/>
                           </a:solidFill>
                         </a:rPr>
-                        <a:t>国际客户接待动线</a:t>
+                        <a:t>主流</a:t>
                       </a:r>
                     </a:p>
                   </a:txBody>
@@ -3619,7 +3621,7 @@
                             <a:srgbClr val="1F2A44"/>
                           </a:solidFill>
                         </a:rPr>
-                        <a:t>4#</a:t>
+                        <a:t>紫竹信息数码港 (5A 甲级)</a:t>
                       </a:r>
                     </a:p>
                   </a:txBody>
@@ -3640,7 +3642,7 @@
                             <a:srgbClr val="1F2A44"/>
                           </a:solidFill>
                         </a:rPr>
-                        <a:t>1–3F 潮玩艺术中心 / 4F 直播 / 5F+ 潮玩集群</a:t>
+                        <a:t>2.1–2.5</a:t>
                       </a:r>
                     </a:p>
                   </a:txBody>
@@ -3661,7 +3663,7 @@
                             <a:srgbClr val="1F2A44"/>
                           </a:solidFill>
                         </a:rPr>
-                        <a:t>北欧会客厅 + AI 共享设计中心</a:t>
+                        <a:t>主流</a:t>
                       </a:r>
                     </a:p>
                   </a:txBody>
@@ -3684,7 +3686,7 @@
                             <a:srgbClr val="1F2A44"/>
                           </a:solidFill>
                         </a:rPr>
-                        <a:t>5#</a:t>
+                        <a:t>紫竹数字创意港 / 龙湖蓝海引擎</a:t>
                       </a:r>
                     </a:p>
                   </a:txBody>
@@ -3705,7 +3707,7 @@
                             <a:srgbClr val="1F2A44"/>
                           </a:solidFill>
                         </a:rPr>
-                        <a:t>1–4F 动漫书店 / 5F+ 潮玩集群</a:t>
+                        <a:t>1.5–3.0</a:t>
                       </a:r>
                     </a:p>
                   </a:txBody>
@@ -3726,7 +3728,7 @@
                             <a:srgbClr val="1F2A44"/>
                           </a:solidFill>
                         </a:rPr>
-                        <a:t>全国潮玩设计大赛主展区</a:t>
+                        <a:t>主流</a:t>
                       </a:r>
                     </a:p>
                   </a:txBody>
@@ -3749,7 +3751,7 @@
                             <a:srgbClr val="1F2A44"/>
                           </a:solidFill>
                         </a:rPr>
-                        <a:t>6#</a:t>
+                        <a:t>云境 443 / 夏日汇国际中心</a:t>
                       </a:r>
                     </a:p>
                   </a:txBody>
@@ -3770,7 +3772,7 @@
                             <a:srgbClr val="1F2A44"/>
                           </a:solidFill>
                         </a:rPr>
-                        <a:t>餐饮 / 商务宴请</a:t>
+                        <a:t>2.3–4.5</a:t>
                       </a:r>
                     </a:p>
                   </a:txBody>
@@ -3791,7 +3793,7 @@
                             <a:srgbClr val="1F2A44"/>
                           </a:solidFill>
                         </a:rPr>
-                        <a:t>招商签约中心 + 央企 VIP</a:t>
+                        <a:t>高端</a:t>
                       </a:r>
                     </a:p>
                   </a:txBody>
@@ -3809,6 +3811,74 @@
       <p:sp>
         <p:nvSpPr>
           <p:cNvPr id="4" name="TextBox 3"/>
+          <p:cNvSpPr txBox="1"/>
+          <p:nvPr/>
+        </p:nvSpPr>
+        <p:spPr>
+          <a:xfrm>
+            <a:off x="548640" y="4114800"/>
+            <a:ext cx="11064240" cy="1828800"/>
+          </a:xfrm>
+          <a:prstGeom prst="rect">
+            <a:avLst/>
+          </a:prstGeom>
+          <a:noFill/>
+        </p:spPr>
+        <p:txBody>
+          <a:bodyPr wrap="square">
+            <a:spAutoFit/>
+          </a:bodyPr>
+          <a:lstStyle/>
+          <a:p>
+            <a:pPr>
+              <a:spcAft>
+                <a:spcPts val="600"/>
+              </a:spcAft>
+              <a:defRPr sz="1400" b="0">
+                <a:solidFill>
+                  <a:srgbClr val="1F2A44"/>
+                </a:solidFill>
+              </a:defRPr>
+            </a:pPr>
+            <a:r>
+              <a:t>结论:办公/产业研发用地主流区间 1.8-2.5 元/㎡/天 (年租 657-913 元/㎡)</a:t>
+            </a:r>
+          </a:p>
+          <a:p>
+            <a:pPr>
+              <a:spcAft>
+                <a:spcPts val="600"/>
+              </a:spcAft>
+              <a:defRPr sz="1400" b="0">
+                <a:solidFill>
+                  <a:srgbClr val="1F2A44"/>
+                </a:solidFill>
+              </a:defRPr>
+            </a:pPr>
+            <a:r>
+              <a:t>原 v1.0 测算 4.5-5.5 元偏高约一倍, v1.1 已下调至市场水平</a:t>
+            </a:r>
+          </a:p>
+          <a:p>
+            <a:pPr>
+              <a:spcAft>
+                <a:spcPts val="600"/>
+              </a:spcAft>
+              <a:defRPr sz="1400" b="0">
+                <a:solidFill>
+                  <a:srgbClr val="1F2A44"/>
+                </a:solidFill>
+              </a:defRPr>
+            </a:pPr>
+            <a:r>
+              <a:t>商业 1F 临街铺位可单独按 3.0-5.0 元定价, 不影响整体加权均值</a:t>
+            </a:r>
+          </a:p>
+        </p:txBody>
+      </p:sp>
+      <p:sp>
+        <p:nvSpPr>
+          <p:cNvPr id="5" name="TextBox 4"/>
           <p:cNvSpPr txBox="1"/>
           <p:nvPr/>
         </p:nvSpPr>
@@ -3906,7 +3976,7 @@
               </a:defRPr>
             </a:pPr>
             <a:r>
-              <a:t>P11 重点业态产能配置</a:t>
+              <a:t>P9c 科技企业服务中心：合资公司对外增值收入引擎</a:t>
             </a:r>
           </a:p>
         </p:txBody>
@@ -3937,14 +4007,14 @@
               <a:spcAft>
                 <a:spcPts val="600"/>
               </a:spcAft>
-              <a:defRPr sz="1800" b="0">
+              <a:defRPr sz="1500" b="1">
                 <a:solidFill>
                   <a:srgbClr val="1F2A44"/>
                 </a:solidFill>
               </a:defRPr>
             </a:pPr>
             <a:r>
-              <a:t>IP 潮玩选品 &amp; 仓储式零售中心 ≈ 5,000㎡ → 合资公司直营，分润</a:t>
+              <a:t>【定位】不是面向森马的费用,而是面向元谷入驻企业 + 大零号湾区域内潜在企业的 9 大类增值服务</a:t>
             </a:r>
           </a:p>
           <a:p>
@@ -3952,14 +4022,14 @@
               <a:spcAft>
                 <a:spcPts val="600"/>
               </a:spcAft>
-              <a:defRPr sz="1800" b="0">
+              <a:defRPr sz="1500" b="1">
                 <a:solidFill>
                   <a:srgbClr val="1F2A44"/>
                 </a:solidFill>
               </a:defRPr>
             </a:pPr>
             <a:r>
-              <a:t>动漫潮玩谷主题街区 ≈ 3,000㎡ → 招商 + 联合运营</a:t>
+              <a:t>【选址】4# 楼 5F+ 或 5# 楼 5F+ 潮玩产业集群 (与北欧会客厅 / AI 共享设计中心同层联动)</a:t>
             </a:r>
           </a:p>
           <a:p>
@@ -3967,44 +4037,134 @@
               <a:spcAft>
                 <a:spcPts val="600"/>
               </a:spcAft>
-              <a:defRPr sz="1800" b="0">
+              <a:defRPr sz="1500" b="1">
                 <a:solidFill>
                   <a:srgbClr val="1F2A44"/>
                 </a:solidFill>
               </a:defRPr>
             </a:pPr>
             <a:r>
-              <a:t>潮玩艺术中心 ≈ 2,000㎡ → 北欧会客厅核心舱</a:t>
-            </a:r>
-          </a:p>
-          <a:p>
-            <a:pPr>
+              <a:t>【9 大类服务】</a:t>
+            </a:r>
+          </a:p>
+          <a:p>
+            <a:pPr lvl="1">
               <a:spcAft>
                 <a:spcPts val="600"/>
               </a:spcAft>
-              <a:defRPr sz="1800" b="0">
-                <a:solidFill>
-                  <a:srgbClr val="1F2A44"/>
-                </a:solidFill>
-              </a:defRPr>
-            </a:pPr>
-            <a:r>
-              <a:t>动漫主题书店 ≈ 1,500㎡ → IP 内容 + 阅读 + 活动</a:t>
-            </a:r>
-          </a:p>
-          <a:p>
-            <a:pPr>
+              <a:defRPr sz="1300" b="0">
+                <a:solidFill>
+                  <a:srgbClr val="55607A"/>
+                </a:solidFill>
+              </a:defRPr>
+            </a:pPr>
+            <a:r>
+              <a:t>① 注册落户 ② 财税法 ③ 知识产权 ④ 政府补贴申报</a:t>
+            </a:r>
+          </a:p>
+          <a:p>
+            <a:pPr lvl="1">
               <a:spcAft>
                 <a:spcPts val="600"/>
               </a:spcAft>
-              <a:defRPr sz="1800" b="0">
+              <a:defRPr sz="1300" b="0">
+                <a:solidFill>
+                  <a:srgbClr val="55607A"/>
+                </a:solidFill>
+              </a:defRPr>
+            </a:pPr>
+            <a:r>
+              <a:t>⑤ 人才与签证 ⑥ 投融资 (FA/并购) ⑦ 品牌与公关 (含出海)</a:t>
+            </a:r>
+          </a:p>
+          <a:p>
+            <a:pPr lvl="1">
+              <a:spcAft>
+                <a:spcPts val="600"/>
+              </a:spcAft>
+              <a:defRPr sz="1300" b="0">
+                <a:solidFill>
+                  <a:srgbClr val="55607A"/>
+                </a:solidFill>
+              </a:defRPr>
+            </a:pPr>
+            <a:r>
+              <a:t>⑧ 数字化工具 (SaaS/AI 设计工作站) ⑨ 培训与认证</a:t>
+            </a:r>
+          </a:p>
+          <a:p>
+            <a:pPr>
+              <a:spcAft>
+                <a:spcPts val="600"/>
+              </a:spcAft>
+              <a:defRPr sz="1500" b="1">
                 <a:solidFill>
                   <a:srgbClr val="1F2A44"/>
                 </a:solidFill>
               </a:defRPr>
             </a:pPr>
             <a:r>
-              <a:t>森马展厅 &amp; 二次元 Livehouse ≈ 700㎡ → 与品牌部联运</a:t>
+              <a:t>【三年营收预测 (基础场景)】</a:t>
+            </a:r>
+          </a:p>
+          <a:p>
+            <a:pPr lvl="1">
+              <a:spcAft>
+                <a:spcPts val="600"/>
+              </a:spcAft>
+              <a:defRPr sz="1300" b="0">
+                <a:solidFill>
+                  <a:srgbClr val="55607A"/>
+                </a:solidFill>
+              </a:defRPr>
+            </a:pPr>
+            <a:r>
+              <a:t>T+1 年: 30 户 × 5 万 ≈ 150 万营收 / 净利 ≈ 53 万</a:t>
+            </a:r>
+          </a:p>
+          <a:p>
+            <a:pPr lvl="1">
+              <a:spcAft>
+                <a:spcPts val="600"/>
+              </a:spcAft>
+              <a:defRPr sz="1300" b="0">
+                <a:solidFill>
+                  <a:srgbClr val="55607A"/>
+                </a:solidFill>
+              </a:defRPr>
+            </a:pPr>
+            <a:r>
+              <a:t>T+2 年: 50 户 × 6 万 ≈ 300 万营收 / 净利 ≈ 114 万</a:t>
+            </a:r>
+          </a:p>
+          <a:p>
+            <a:pPr lvl="1">
+              <a:spcAft>
+                <a:spcPts val="600"/>
+              </a:spcAft>
+              <a:defRPr sz="1300" b="0">
+                <a:solidFill>
+                  <a:srgbClr val="55607A"/>
+                </a:solidFill>
+              </a:defRPr>
+            </a:pPr>
+            <a:r>
+              <a:t>T+3 年: 80 户 × 8 万 ≈ 640 万营收 / 净利 ≈ 256 万</a:t>
+            </a:r>
+          </a:p>
+          <a:p>
+            <a:pPr lvl="1">
+              <a:spcAft>
+                <a:spcPts val="600"/>
+              </a:spcAft>
+              <a:defRPr sz="1300" b="0">
+                <a:solidFill>
+                  <a:srgbClr val="55607A"/>
+                </a:solidFill>
+              </a:defRPr>
+            </a:pPr>
+            <a:r>
+              <a:t>三年累计营收 ≈ 1,090 万 / 累计净利 ≈ 423 万 / 丙方 30% 分红 ≈ 127 万</a:t>
             </a:r>
           </a:p>
         </p:txBody>
@@ -4109,94 +4269,493 @@
               </a:defRPr>
             </a:pPr>
             <a:r>
-              <a:t>P12 合作模式：合资公司架构</a:t>
-            </a:r>
-          </a:p>
-        </p:txBody>
-      </p:sp>
-      <p:sp>
-        <p:nvSpPr>
-          <p:cNvPr id="3" name="TextBox 2"/>
-          <p:cNvSpPr txBox="1"/>
+              <a:t>P10 楼宇产业地图（1#–6#）</a:t>
+            </a:r>
+          </a:p>
+        </p:txBody>
+      </p:sp>
+      <p:graphicFrame>
+        <p:nvGraphicFramePr>
+          <p:cNvPr id="3" name="Table 2"/>
+          <p:cNvGraphicFramePr>
+            <a:graphicFrameLocks noGrp="1"/>
+          </p:cNvGraphicFramePr>
           <p:nvPr/>
-        </p:nvSpPr>
-        <p:spPr>
-          <a:xfrm>
-            <a:off x="548640" y="1097280"/>
-            <a:ext cx="11064240" cy="5212080"/>
-          </a:xfrm>
-          <a:prstGeom prst="rect">
-            <a:avLst/>
-          </a:prstGeom>
-          <a:noFill/>
-        </p:spPr>
-        <p:txBody>
-          <a:bodyPr wrap="square">
-            <a:spAutoFit/>
-          </a:bodyPr>
-          <a:lstStyle/>
-          <a:p>
-            <a:pPr>
-              <a:spcAft>
-                <a:spcPts val="600"/>
-              </a:spcAft>
-              <a:defRPr sz="1800" b="0">
-                <a:solidFill>
-                  <a:srgbClr val="1F2A44"/>
-                </a:solidFill>
-              </a:defRPr>
-            </a:pPr>
-            <a:r>
-              <a:t>三方：森马（资产方） / 危总团队（属地资源 + LP） / 胡教授团队（运营 + 资源 GP）</a:t>
-            </a:r>
-          </a:p>
-          <a:p>
-            <a:pPr>
-              <a:spcAft>
-                <a:spcPts val="600"/>
-              </a:spcAft>
-              <a:defRPr sz="1800" b="0">
-                <a:solidFill>
-                  <a:srgbClr val="1F2A44"/>
-                </a:solidFill>
-              </a:defRPr>
-            </a:pPr>
-            <a:r>
-              <a:t>架构：合资公司持有元谷招商运营独家授权 + 共享配套直营权</a:t>
-            </a:r>
-          </a:p>
-          <a:p>
-            <a:pPr>
-              <a:spcAft>
-                <a:spcPts val="600"/>
-              </a:spcAft>
-              <a:defRPr sz="1800" b="0">
-                <a:solidFill>
-                  <a:srgbClr val="1F2A44"/>
-                </a:solidFill>
-              </a:defRPr>
-            </a:pPr>
-            <a:r>
-              <a:t>股比建议：森马 51% / 危总 19% / 胡教授团队 30%（含期权池）</a:t>
-            </a:r>
-          </a:p>
-          <a:p>
-            <a:pPr>
-              <a:spcAft>
-                <a:spcPts val="600"/>
-              </a:spcAft>
-              <a:defRPr sz="1800" b="0">
-                <a:solidFill>
-                  <a:srgbClr val="1F2A44"/>
-                </a:solidFill>
-              </a:defRPr>
-            </a:pPr>
-            <a:r>
-              <a:t>治理：3 人董事会，胡教授任首席战略运营官 (CSO)</a:t>
-            </a:r>
-          </a:p>
-        </p:txBody>
-      </p:sp>
+        </p:nvGraphicFramePr>
+        <p:xfrm>
+          <a:off x="548640" y="1097280"/>
+          <a:ext cx="11064240" cy="2926080"/>
+        </p:xfrm>
+        <a:graphic>
+          <a:graphicData uri="http://schemas.openxmlformats.org/drawingml/2006/table">
+            <a:tbl>
+              <a:tblPr firstRow="1" bandRow="1">
+                <a:tableStyleId>{5C22544A-7EE6-4342-B048-85BDC9FD1C3A}</a:tableStyleId>
+              </a:tblPr>
+              <a:tblGrid>
+                <a:gridCol w="3688080"/>
+                <a:gridCol w="3688080"/>
+                <a:gridCol w="3688080"/>
+              </a:tblGrid>
+              <a:tr h="418011">
+                <a:tc>
+                  <a:txBody>
+                    <a:bodyPr/>
+                    <a:lstStyle/>
+                    <a:p>
+                      <a:r>
+                        <a:rPr b="1" sz="1300">
+                          <a:solidFill>
+                            <a:srgbClr val="FFFFFF"/>
+                          </a:solidFill>
+                        </a:rPr>
+                        <a:t>楼栋</a:t>
+                      </a:r>
+                    </a:p>
+                  </a:txBody>
+                  <a:tcPr>
+                    <a:solidFill>
+                      <a:srgbClr val="142C5E"/>
+                    </a:solidFill>
+                  </a:tcPr>
+                </a:tc>
+                <a:tc>
+                  <a:txBody>
+                    <a:bodyPr/>
+                    <a:lstStyle/>
+                    <a:p>
+                      <a:r>
+                        <a:rPr b="1" sz="1300">
+                          <a:solidFill>
+                            <a:srgbClr val="FFFFFF"/>
+                          </a:solidFill>
+                        </a:rPr>
+                        <a:t>既定功能</a:t>
+                      </a:r>
+                    </a:p>
+                  </a:txBody>
+                  <a:tcPr>
+                    <a:solidFill>
+                      <a:srgbClr val="142C5E"/>
+                    </a:solidFill>
+                  </a:tcPr>
+                </a:tc>
+                <a:tc>
+                  <a:txBody>
+                    <a:bodyPr/>
+                    <a:lstStyle/>
+                    <a:p>
+                      <a:r>
+                        <a:rPr b="1" sz="1300">
+                          <a:solidFill>
+                            <a:srgbClr val="FFFFFF"/>
+                          </a:solidFill>
+                        </a:rPr>
+                        <a:t>我们的产业增益</a:t>
+                      </a:r>
+                    </a:p>
+                  </a:txBody>
+                  <a:tcPr>
+                    <a:solidFill>
+                      <a:srgbClr val="142C5E"/>
+                    </a:solidFill>
+                  </a:tcPr>
+                </a:tc>
+              </a:tr>
+              <a:tr h="418011">
+                <a:tc>
+                  <a:txBody>
+                    <a:bodyPr/>
+                    <a:lstStyle/>
+                    <a:p>
+                      <a:r>
+                        <a:rPr sz="1100">
+                          <a:solidFill>
+                            <a:srgbClr val="1F2A44"/>
+                          </a:solidFill>
+                        </a:rPr>
+                        <a:t>1#</a:t>
+                      </a:r>
+                    </a:p>
+                  </a:txBody>
+                  <a:tcPr>
+                    <a:solidFill>
+                      <a:srgbClr val="F5F7FA"/>
+                    </a:solidFill>
+                  </a:tcPr>
+                </a:tc>
+                <a:tc>
+                  <a:txBody>
+                    <a:bodyPr/>
+                    <a:lstStyle/>
+                    <a:p>
+                      <a:r>
+                        <a:rPr sz="1100">
+                          <a:solidFill>
+                            <a:srgbClr val="1F2A44"/>
+                          </a:solidFill>
+                        </a:rPr>
+                        <a:t>森马总部 + 1–4F 零售</a:t>
+                      </a:r>
+                    </a:p>
+                  </a:txBody>
+                  <a:tcPr>
+                    <a:solidFill>
+                      <a:srgbClr val="F5F7FA"/>
+                    </a:solidFill>
+                  </a:tcPr>
+                </a:tc>
+                <a:tc>
+                  <a:txBody>
+                    <a:bodyPr/>
+                    <a:lstStyle/>
+                    <a:p>
+                      <a:r>
+                        <a:rPr sz="1100">
+                          <a:solidFill>
+                            <a:srgbClr val="1F2A44"/>
+                          </a:solidFill>
+                        </a:rPr>
+                        <a:t>福布斯榜单 / 国际首发节点</a:t>
+                      </a:r>
+                    </a:p>
+                  </a:txBody>
+                  <a:tcPr>
+                    <a:solidFill>
+                      <a:srgbClr val="F5F7FA"/>
+                    </a:solidFill>
+                  </a:tcPr>
+                </a:tc>
+              </a:tr>
+              <a:tr h="418011">
+                <a:tc>
+                  <a:txBody>
+                    <a:bodyPr/>
+                    <a:lstStyle/>
+                    <a:p>
+                      <a:r>
+                        <a:rPr sz="1100">
+                          <a:solidFill>
+                            <a:srgbClr val="1F2A44"/>
+                          </a:solidFill>
+                        </a:rPr>
+                        <a:t>2#</a:t>
+                      </a:r>
+                    </a:p>
+                  </a:txBody>
+                  <a:tcPr>
+                    <a:solidFill>
+                      <a:srgbClr val="FFFFFF"/>
+                    </a:solidFill>
+                  </a:tcPr>
+                </a:tc>
+                <a:tc>
+                  <a:txBody>
+                    <a:bodyPr/>
+                    <a:lstStyle/>
+                    <a:p>
+                      <a:r>
+                        <a:rPr sz="1100">
+                          <a:solidFill>
+                            <a:srgbClr val="1F2A44"/>
+                          </a:solidFill>
+                        </a:rPr>
+                        <a:t>二次元 Livehouse / 秀场</a:t>
+                      </a:r>
+                    </a:p>
+                  </a:txBody>
+                  <a:tcPr>
+                    <a:solidFill>
+                      <a:srgbClr val="FFFFFF"/>
+                    </a:solidFill>
+                  </a:tcPr>
+                </a:tc>
+                <a:tc>
+                  <a:txBody>
+                    <a:bodyPr/>
+                    <a:lstStyle/>
+                    <a:p>
+                      <a:r>
+                        <a:rPr sz="1100">
+                          <a:solidFill>
+                            <a:srgbClr val="1F2A44"/>
+                          </a:solidFill>
+                        </a:rPr>
+                        <a:t>科技开放麦 + 潮玩大赛主舞台</a:t>
+                      </a:r>
+                    </a:p>
+                  </a:txBody>
+                  <a:tcPr>
+                    <a:solidFill>
+                      <a:srgbClr val="FFFFFF"/>
+                    </a:solidFill>
+                  </a:tcPr>
+                </a:tc>
+              </a:tr>
+              <a:tr h="418011">
+                <a:tc>
+                  <a:txBody>
+                    <a:bodyPr/>
+                    <a:lstStyle/>
+                    <a:p>
+                      <a:r>
+                        <a:rPr sz="1100">
+                          <a:solidFill>
+                            <a:srgbClr val="1F2A44"/>
+                          </a:solidFill>
+                        </a:rPr>
+                        <a:t>3#</a:t>
+                      </a:r>
+                    </a:p>
+                  </a:txBody>
+                  <a:tcPr>
+                    <a:solidFill>
+                      <a:srgbClr val="F5F7FA"/>
+                    </a:solidFill>
+                  </a:tcPr>
+                </a:tc>
+                <a:tc>
+                  <a:txBody>
+                    <a:bodyPr/>
+                    <a:lstStyle/>
+                    <a:p>
+                      <a:r>
+                        <a:rPr sz="1100">
+                          <a:solidFill>
+                            <a:srgbClr val="1F2A44"/>
+                          </a:solidFill>
+                        </a:rPr>
+                        <a:t>1–4F 运动+萌宠 / 5F+ 酒店</a:t>
+                      </a:r>
+                    </a:p>
+                  </a:txBody>
+                  <a:tcPr>
+                    <a:solidFill>
+                      <a:srgbClr val="F5F7FA"/>
+                    </a:solidFill>
+                  </a:tcPr>
+                </a:tc>
+                <a:tc>
+                  <a:txBody>
+                    <a:bodyPr/>
+                    <a:lstStyle/>
+                    <a:p>
+                      <a:r>
+                        <a:rPr sz="1100">
+                          <a:solidFill>
+                            <a:srgbClr val="1F2A44"/>
+                          </a:solidFill>
+                        </a:rPr>
+                        <a:t>国际客户接待动线</a:t>
+                      </a:r>
+                    </a:p>
+                  </a:txBody>
+                  <a:tcPr>
+                    <a:solidFill>
+                      <a:srgbClr val="F5F7FA"/>
+                    </a:solidFill>
+                  </a:tcPr>
+                </a:tc>
+              </a:tr>
+              <a:tr h="418011">
+                <a:tc>
+                  <a:txBody>
+                    <a:bodyPr/>
+                    <a:lstStyle/>
+                    <a:p>
+                      <a:r>
+                        <a:rPr sz="1100">
+                          <a:solidFill>
+                            <a:srgbClr val="1F2A44"/>
+                          </a:solidFill>
+                        </a:rPr>
+                        <a:t>4#</a:t>
+                      </a:r>
+                    </a:p>
+                  </a:txBody>
+                  <a:tcPr>
+                    <a:solidFill>
+                      <a:srgbClr val="FFFFFF"/>
+                    </a:solidFill>
+                  </a:tcPr>
+                </a:tc>
+                <a:tc>
+                  <a:txBody>
+                    <a:bodyPr/>
+                    <a:lstStyle/>
+                    <a:p>
+                      <a:r>
+                        <a:rPr sz="1100">
+                          <a:solidFill>
+                            <a:srgbClr val="1F2A44"/>
+                          </a:solidFill>
+                        </a:rPr>
+                        <a:t>1–3F 潮玩艺术中心 / 4F 直播 / 5F+ 潮玩集群</a:t>
+                      </a:r>
+                    </a:p>
+                  </a:txBody>
+                  <a:tcPr>
+                    <a:solidFill>
+                      <a:srgbClr val="FFFFFF"/>
+                    </a:solidFill>
+                  </a:tcPr>
+                </a:tc>
+                <a:tc>
+                  <a:txBody>
+                    <a:bodyPr/>
+                    <a:lstStyle/>
+                    <a:p>
+                      <a:r>
+                        <a:rPr sz="1100">
+                          <a:solidFill>
+                            <a:srgbClr val="1F2A44"/>
+                          </a:solidFill>
+                        </a:rPr>
+                        <a:t>北欧会客厅 + AI 共享设计中心</a:t>
+                      </a:r>
+                    </a:p>
+                  </a:txBody>
+                  <a:tcPr>
+                    <a:solidFill>
+                      <a:srgbClr val="FFFFFF"/>
+                    </a:solidFill>
+                  </a:tcPr>
+                </a:tc>
+              </a:tr>
+              <a:tr h="418011">
+                <a:tc>
+                  <a:txBody>
+                    <a:bodyPr/>
+                    <a:lstStyle/>
+                    <a:p>
+                      <a:r>
+                        <a:rPr sz="1100">
+                          <a:solidFill>
+                            <a:srgbClr val="1F2A44"/>
+                          </a:solidFill>
+                        </a:rPr>
+                        <a:t>5#</a:t>
+                      </a:r>
+                    </a:p>
+                  </a:txBody>
+                  <a:tcPr>
+                    <a:solidFill>
+                      <a:srgbClr val="F5F7FA"/>
+                    </a:solidFill>
+                  </a:tcPr>
+                </a:tc>
+                <a:tc>
+                  <a:txBody>
+                    <a:bodyPr/>
+                    <a:lstStyle/>
+                    <a:p>
+                      <a:r>
+                        <a:rPr sz="1100">
+                          <a:solidFill>
+                            <a:srgbClr val="1F2A44"/>
+                          </a:solidFill>
+                        </a:rPr>
+                        <a:t>1–4F 动漫书店 / 5F+ 潮玩集群</a:t>
+                      </a:r>
+                    </a:p>
+                  </a:txBody>
+                  <a:tcPr>
+                    <a:solidFill>
+                      <a:srgbClr val="F5F7FA"/>
+                    </a:solidFill>
+                  </a:tcPr>
+                </a:tc>
+                <a:tc>
+                  <a:txBody>
+                    <a:bodyPr/>
+                    <a:lstStyle/>
+                    <a:p>
+                      <a:r>
+                        <a:rPr sz="1100">
+                          <a:solidFill>
+                            <a:srgbClr val="1F2A44"/>
+                          </a:solidFill>
+                        </a:rPr>
+                        <a:t>全国潮玩设计大赛主展区</a:t>
+                      </a:r>
+                    </a:p>
+                  </a:txBody>
+                  <a:tcPr>
+                    <a:solidFill>
+                      <a:srgbClr val="F5F7FA"/>
+                    </a:solidFill>
+                  </a:tcPr>
+                </a:tc>
+              </a:tr>
+              <a:tr h="418014">
+                <a:tc>
+                  <a:txBody>
+                    <a:bodyPr/>
+                    <a:lstStyle/>
+                    <a:p>
+                      <a:r>
+                        <a:rPr sz="1100">
+                          <a:solidFill>
+                            <a:srgbClr val="1F2A44"/>
+                          </a:solidFill>
+                        </a:rPr>
+                        <a:t>6#</a:t>
+                      </a:r>
+                    </a:p>
+                  </a:txBody>
+                  <a:tcPr>
+                    <a:solidFill>
+                      <a:srgbClr val="FFFFFF"/>
+                    </a:solidFill>
+                  </a:tcPr>
+                </a:tc>
+                <a:tc>
+                  <a:txBody>
+                    <a:bodyPr/>
+                    <a:lstStyle/>
+                    <a:p>
+                      <a:r>
+                        <a:rPr sz="1100">
+                          <a:solidFill>
+                            <a:srgbClr val="1F2A44"/>
+                          </a:solidFill>
+                        </a:rPr>
+                        <a:t>餐饮 / 商务宴请</a:t>
+                      </a:r>
+                    </a:p>
+                  </a:txBody>
+                  <a:tcPr>
+                    <a:solidFill>
+                      <a:srgbClr val="FFFFFF"/>
+                    </a:solidFill>
+                  </a:tcPr>
+                </a:tc>
+                <a:tc>
+                  <a:txBody>
+                    <a:bodyPr/>
+                    <a:lstStyle/>
+                    <a:p>
+                      <a:r>
+                        <a:rPr sz="1100">
+                          <a:solidFill>
+                            <a:srgbClr val="1F2A44"/>
+                          </a:solidFill>
+                        </a:rPr>
+                        <a:t>招商签约中心 + 央企 VIP</a:t>
+                      </a:r>
+                    </a:p>
+                  </a:txBody>
+                  <a:tcPr>
+                    <a:solidFill>
+                      <a:srgbClr val="FFFFFF"/>
+                    </a:solidFill>
+                  </a:tcPr>
+                </a:tc>
+              </a:tr>
+            </a:tbl>
+          </a:graphicData>
+        </a:graphic>
+      </p:graphicFrame>
       <p:sp>
         <p:nvSpPr>
           <p:cNvPr id="4" name="TextBox 3"/>
@@ -4297,428 +4856,109 @@
               </a:defRPr>
             </a:pPr>
             <a:r>
-              <a:t>P13 收入结构（与 Excel 测算一一对应）</a:t>
-            </a:r>
-          </a:p>
-        </p:txBody>
-      </p:sp>
-      <p:graphicFrame>
-        <p:nvGraphicFramePr>
-          <p:cNvPr id="3" name="Table 2"/>
-          <p:cNvGraphicFramePr>
-            <a:graphicFrameLocks noGrp="1"/>
-          </p:cNvGraphicFramePr>
+              <a:t>P11 重点业态产能配置</a:t>
+            </a:r>
+          </a:p>
+        </p:txBody>
+      </p:sp>
+      <p:sp>
+        <p:nvSpPr>
+          <p:cNvPr id="3" name="TextBox 2"/>
+          <p:cNvSpPr txBox="1"/>
           <p:nvPr/>
-        </p:nvGraphicFramePr>
-        <p:xfrm>
-          <a:off x="548640" y="1188720"/>
-          <a:ext cx="11064240" cy="2514600"/>
-        </p:xfrm>
-        <a:graphic>
-          <a:graphicData uri="http://schemas.openxmlformats.org/drawingml/2006/table">
-            <a:tbl>
-              <a:tblPr firstRow="1" bandRow="1">
-                <a:tableStyleId>{5C22544A-7EE6-4342-B048-85BDC9FD1C3A}</a:tableStyleId>
-              </a:tblPr>
-              <a:tblGrid>
-                <a:gridCol w="3688080"/>
-                <a:gridCol w="3688080"/>
-                <a:gridCol w="3688080"/>
-              </a:tblGrid>
-              <a:tr h="419100">
-                <a:tc>
-                  <a:txBody>
-                    <a:bodyPr/>
-                    <a:lstStyle/>
-                    <a:p>
-                      <a:r>
-                        <a:rPr b="1" sz="1300">
-                          <a:solidFill>
-                            <a:srgbClr val="FFFFFF"/>
-                          </a:solidFill>
-                        </a:rPr>
-                        <a:t>收入类别</a:t>
-                      </a:r>
-                    </a:p>
-                  </a:txBody>
-                  <a:tcPr>
-                    <a:solidFill>
-                      <a:srgbClr val="142C5E"/>
-                    </a:solidFill>
-                  </a:tcPr>
-                </a:tc>
-                <a:tc>
-                  <a:txBody>
-                    <a:bodyPr/>
-                    <a:lstStyle/>
-                    <a:p>
-                      <a:r>
-                        <a:rPr b="1" sz="1300">
-                          <a:solidFill>
-                            <a:srgbClr val="FFFFFF"/>
-                          </a:solidFill>
-                        </a:rPr>
-                        <a:t>测算逻辑</a:t>
-                      </a:r>
-                    </a:p>
-                  </a:txBody>
-                  <a:tcPr>
-                    <a:solidFill>
-                      <a:srgbClr val="142C5E"/>
-                    </a:solidFill>
-                  </a:tcPr>
-                </a:tc>
-                <a:tc>
-                  <a:txBody>
-                    <a:bodyPr/>
-                    <a:lstStyle/>
-                    <a:p>
-                      <a:r>
-                        <a:rPr b="1" sz="1300">
-                          <a:solidFill>
-                            <a:srgbClr val="FFFFFF"/>
-                          </a:solidFill>
-                        </a:rPr>
-                        <a:t>结算节奏</a:t>
-                      </a:r>
-                    </a:p>
-                  </a:txBody>
-                  <a:tcPr>
-                    <a:solidFill>
-                      <a:srgbClr val="142C5E"/>
-                    </a:solidFill>
-                  </a:tcPr>
-                </a:tc>
-              </a:tr>
-              <a:tr h="419100">
-                <a:tc>
-                  <a:txBody>
-                    <a:bodyPr/>
-                    <a:lstStyle/>
-                    <a:p>
-                      <a:r>
-                        <a:rPr sz="1100">
-                          <a:solidFill>
-                            <a:srgbClr val="1F2A44"/>
-                          </a:solidFill>
-                        </a:rPr>
-                        <a:t>固定月费 Retainer</a:t>
-                      </a:r>
-                    </a:p>
-                  </a:txBody>
-                  <a:tcPr>
-                    <a:solidFill>
-                      <a:srgbClr val="F5F7FA"/>
-                    </a:solidFill>
-                  </a:tcPr>
-                </a:tc>
-                <a:tc>
-                  <a:txBody>
-                    <a:bodyPr/>
-                    <a:lstStyle/>
-                    <a:p>
-                      <a:r>
-                        <a:rPr sz="1100">
-                          <a:solidFill>
-                            <a:srgbClr val="1F2A44"/>
-                          </a:solidFill>
-                        </a:rPr>
-                        <a:t>30–50 万元/月</a:t>
-                      </a:r>
-                    </a:p>
-                  </a:txBody>
-                  <a:tcPr>
-                    <a:solidFill>
-                      <a:srgbClr val="F5F7FA"/>
-                    </a:solidFill>
-                  </a:tcPr>
-                </a:tc>
-                <a:tc>
-                  <a:txBody>
-                    <a:bodyPr/>
-                    <a:lstStyle/>
-                    <a:p>
-                      <a:r>
-                        <a:rPr sz="1100">
-                          <a:solidFill>
-                            <a:srgbClr val="1F2A44"/>
-                          </a:solidFill>
-                        </a:rPr>
-                        <a:t>按月支付</a:t>
-                      </a:r>
-                    </a:p>
-                  </a:txBody>
-                  <a:tcPr>
-                    <a:solidFill>
-                      <a:srgbClr val="F5F7FA"/>
-                    </a:solidFill>
-                  </a:tcPr>
-                </a:tc>
-              </a:tr>
-              <a:tr h="419100">
-                <a:tc>
-                  <a:txBody>
-                    <a:bodyPr/>
-                    <a:lstStyle/>
-                    <a:p>
-                      <a:r>
-                        <a:rPr sz="1100">
-                          <a:solidFill>
-                            <a:srgbClr val="1F2A44"/>
-                          </a:solidFill>
-                        </a:rPr>
-                        <a:t>专项奖项激励</a:t>
-                      </a:r>
-                    </a:p>
-                  </a:txBody>
-                  <a:tcPr>
-                    <a:solidFill>
-                      <a:srgbClr val="FFFFFF"/>
-                    </a:solidFill>
-                  </a:tcPr>
-                </a:tc>
-                <a:tc>
-                  <a:txBody>
-                    <a:bodyPr/>
-                    <a:lstStyle/>
-                    <a:p>
-                      <a:r>
-                        <a:rPr sz="1100">
-                          <a:solidFill>
-                            <a:srgbClr val="1F2A44"/>
-                          </a:solidFill>
-                        </a:rPr>
-                        <a:t>牌照 / 福布斯 / 小镇奖项 → 按数量奖励</a:t>
-                      </a:r>
-                    </a:p>
-                  </a:txBody>
-                  <a:tcPr>
-                    <a:solidFill>
-                      <a:srgbClr val="FFFFFF"/>
-                    </a:solidFill>
-                  </a:tcPr>
-                </a:tc>
-                <a:tc>
-                  <a:txBody>
-                    <a:bodyPr/>
-                    <a:lstStyle/>
-                    <a:p>
-                      <a:r>
-                        <a:rPr sz="1100">
-                          <a:solidFill>
-                            <a:srgbClr val="1F2A44"/>
-                          </a:solidFill>
-                        </a:rPr>
-                        <a:t>按事件结算</a:t>
-                      </a:r>
-                    </a:p>
-                  </a:txBody>
-                  <a:tcPr>
-                    <a:solidFill>
-                      <a:srgbClr val="FFFFFF"/>
-                    </a:solidFill>
-                  </a:tcPr>
-                </a:tc>
-              </a:tr>
-              <a:tr h="419100">
-                <a:tc>
-                  <a:txBody>
-                    <a:bodyPr/>
-                    <a:lstStyle/>
-                    <a:p>
-                      <a:r>
-                        <a:rPr sz="1100">
-                          <a:solidFill>
-                            <a:srgbClr val="1F2A44"/>
-                          </a:solidFill>
-                        </a:rPr>
-                        <a:t>活动运营收入</a:t>
-                      </a:r>
-                    </a:p>
-                  </a:txBody>
-                  <a:tcPr>
-                    <a:solidFill>
-                      <a:srgbClr val="F5F7FA"/>
-                    </a:solidFill>
-                  </a:tcPr>
-                </a:tc>
-                <a:tc>
-                  <a:txBody>
-                    <a:bodyPr/>
-                    <a:lstStyle/>
-                    <a:p>
-                      <a:r>
-                        <a:rPr sz="1100">
-                          <a:solidFill>
-                            <a:srgbClr val="1F2A44"/>
-                          </a:solidFill>
-                        </a:rPr>
-                        <a:t>单场科技开放麦 / 潮玩大赛执行利润分成</a:t>
-                      </a:r>
-                    </a:p>
-                  </a:txBody>
-                  <a:tcPr>
-                    <a:solidFill>
-                      <a:srgbClr val="F5F7FA"/>
-                    </a:solidFill>
-                  </a:tcPr>
-                </a:tc>
-                <a:tc>
-                  <a:txBody>
-                    <a:bodyPr/>
-                    <a:lstStyle/>
-                    <a:p>
-                      <a:r>
-                        <a:rPr sz="1100">
-                          <a:solidFill>
-                            <a:srgbClr val="1F2A44"/>
-                          </a:solidFill>
-                        </a:rPr>
-                        <a:t>按场结算</a:t>
-                      </a:r>
-                    </a:p>
-                  </a:txBody>
-                  <a:tcPr>
-                    <a:solidFill>
-                      <a:srgbClr val="F5F7FA"/>
-                    </a:solidFill>
-                  </a:tcPr>
-                </a:tc>
-              </a:tr>
-              <a:tr h="419100">
-                <a:tc>
-                  <a:txBody>
-                    <a:bodyPr/>
-                    <a:lstStyle/>
-                    <a:p>
-                      <a:r>
-                        <a:rPr sz="1100">
-                          <a:solidFill>
-                            <a:srgbClr val="1F2A44"/>
-                          </a:solidFill>
-                        </a:rPr>
-                        <a:t>招商佣金</a:t>
-                      </a:r>
-                    </a:p>
-                  </a:txBody>
-                  <a:tcPr>
-                    <a:solidFill>
-                      <a:srgbClr val="FFFFFF"/>
-                    </a:solidFill>
-                  </a:tcPr>
-                </a:tc>
-                <a:tc>
-                  <a:txBody>
-                    <a:bodyPr/>
-                    <a:lstStyle/>
-                    <a:p>
-                      <a:r>
-                        <a:rPr sz="1100">
-                          <a:solidFill>
-                            <a:srgbClr val="1F2A44"/>
-                          </a:solidFill>
-                        </a:rPr>
-                        <a:t>实际成交年租金的 1–2.5 个月（按面积阶梯）</a:t>
-                      </a:r>
-                    </a:p>
-                  </a:txBody>
-                  <a:tcPr>
-                    <a:solidFill>
-                      <a:srgbClr val="FFFFFF"/>
-                    </a:solidFill>
-                  </a:tcPr>
-                </a:tc>
-                <a:tc>
-                  <a:txBody>
-                    <a:bodyPr/>
-                    <a:lstStyle/>
-                    <a:p>
-                      <a:r>
-                        <a:rPr sz="1100">
-                          <a:solidFill>
-                            <a:srgbClr val="1F2A44"/>
-                          </a:solidFill>
-                        </a:rPr>
-                        <a:t>签约 + 起租后</a:t>
-                      </a:r>
-                    </a:p>
-                  </a:txBody>
-                  <a:tcPr>
-                    <a:solidFill>
-                      <a:srgbClr val="FFFFFF"/>
-                    </a:solidFill>
-                  </a:tcPr>
-                </a:tc>
-              </a:tr>
-              <a:tr h="419100">
-                <a:tc>
-                  <a:txBody>
-                    <a:bodyPr/>
-                    <a:lstStyle/>
-                    <a:p>
-                      <a:r>
-                        <a:rPr sz="1100">
-                          <a:solidFill>
-                            <a:srgbClr val="1F2A44"/>
-                          </a:solidFill>
-                        </a:rPr>
-                        <a:t>股权分红</a:t>
-                      </a:r>
-                    </a:p>
-                  </a:txBody>
-                  <a:tcPr>
-                    <a:solidFill>
-                      <a:srgbClr val="F5F7FA"/>
-                    </a:solidFill>
-                  </a:tcPr>
-                </a:tc>
-                <a:tc>
-                  <a:txBody>
-                    <a:bodyPr/>
-                    <a:lstStyle/>
-                    <a:p>
-                      <a:r>
-                        <a:rPr sz="1100">
-                          <a:solidFill>
-                            <a:srgbClr val="1F2A44"/>
-                          </a:solidFill>
-                        </a:rPr>
-                        <a:t>合资公司净利润按股比分配</a:t>
-                      </a:r>
-                    </a:p>
-                  </a:txBody>
-                  <a:tcPr>
-                    <a:solidFill>
-                      <a:srgbClr val="F5F7FA"/>
-                    </a:solidFill>
-                  </a:tcPr>
-                </a:tc>
-                <a:tc>
-                  <a:txBody>
-                    <a:bodyPr/>
-                    <a:lstStyle/>
-                    <a:p>
-                      <a:r>
-                        <a:rPr sz="1100">
-                          <a:solidFill>
-                            <a:srgbClr val="1F2A44"/>
-                          </a:solidFill>
-                        </a:rPr>
-                        <a:t>年度结算</a:t>
-                      </a:r>
-                    </a:p>
-                  </a:txBody>
-                  <a:tcPr>
-                    <a:solidFill>
-                      <a:srgbClr val="F5F7FA"/>
-                    </a:solidFill>
-                  </a:tcPr>
-                </a:tc>
-              </a:tr>
-            </a:tbl>
-          </a:graphicData>
-        </a:graphic>
-      </p:graphicFrame>
+        </p:nvSpPr>
+        <p:spPr>
+          <a:xfrm>
+            <a:off x="548640" y="1097280"/>
+            <a:ext cx="11064240" cy="5212080"/>
+          </a:xfrm>
+          <a:prstGeom prst="rect">
+            <a:avLst/>
+          </a:prstGeom>
+          <a:noFill/>
+        </p:spPr>
+        <p:txBody>
+          <a:bodyPr wrap="square">
+            <a:spAutoFit/>
+          </a:bodyPr>
+          <a:lstStyle/>
+          <a:p>
+            <a:pPr>
+              <a:spcAft>
+                <a:spcPts val="600"/>
+              </a:spcAft>
+              <a:defRPr sz="1800" b="0">
+                <a:solidFill>
+                  <a:srgbClr val="1F2A44"/>
+                </a:solidFill>
+              </a:defRPr>
+            </a:pPr>
+            <a:r>
+              <a:t>IP 潮玩选品 &amp; 仓储式零售中心 ≈ 5,000㎡ → 合资公司直营，分润</a:t>
+            </a:r>
+          </a:p>
+          <a:p>
+            <a:pPr>
+              <a:spcAft>
+                <a:spcPts val="600"/>
+              </a:spcAft>
+              <a:defRPr sz="1800" b="0">
+                <a:solidFill>
+                  <a:srgbClr val="1F2A44"/>
+                </a:solidFill>
+              </a:defRPr>
+            </a:pPr>
+            <a:r>
+              <a:t>动漫潮玩谷主题街区 ≈ 3,000㎡ → 招商 + 联合运营</a:t>
+            </a:r>
+          </a:p>
+          <a:p>
+            <a:pPr>
+              <a:spcAft>
+                <a:spcPts val="600"/>
+              </a:spcAft>
+              <a:defRPr sz="1800" b="0">
+                <a:solidFill>
+                  <a:srgbClr val="1F2A44"/>
+                </a:solidFill>
+              </a:defRPr>
+            </a:pPr>
+            <a:r>
+              <a:t>潮玩艺术中心 ≈ 2,000㎡ → 北欧会客厅核心舱</a:t>
+            </a:r>
+          </a:p>
+          <a:p>
+            <a:pPr>
+              <a:spcAft>
+                <a:spcPts val="600"/>
+              </a:spcAft>
+              <a:defRPr sz="1800" b="0">
+                <a:solidFill>
+                  <a:srgbClr val="1F2A44"/>
+                </a:solidFill>
+              </a:defRPr>
+            </a:pPr>
+            <a:r>
+              <a:t>动漫主题书店 ≈ 1,500㎡ → IP 内容 + 阅读 + 活动</a:t>
+            </a:r>
+          </a:p>
+          <a:p>
+            <a:pPr>
+              <a:spcAft>
+                <a:spcPts val="600"/>
+              </a:spcAft>
+              <a:defRPr sz="1800" b="0">
+                <a:solidFill>
+                  <a:srgbClr val="1F2A44"/>
+                </a:solidFill>
+              </a:defRPr>
+            </a:pPr>
+            <a:r>
+              <a:t>森马展厅 &amp; 二次元 Livehouse ≈ 700㎡ → 与品牌部联运</a:t>
+            </a:r>
+          </a:p>
+        </p:txBody>
+      </p:sp>
       <p:sp>
         <p:nvSpPr>
           <p:cNvPr id="4" name="TextBox 3"/>
@@ -4819,7 +5059,7 @@
               </a:defRPr>
             </a:pPr>
             <a:r>
-              <a:t>P14 第一年关键里程碑（T+0 → T+12）</a:t>
+              <a:t>P12 合作模式：合资公司架构</a:t>
             </a:r>
           </a:p>
         </p:txBody>
@@ -4857,7 +5097,7 @@
               </a:defRPr>
             </a:pPr>
             <a:r>
-              <a:t>T+0 ~ T+3：合资公司注册 / 月费起算 / 北欧会客厅签约入驻 4# 楼</a:t>
+              <a:t>三方：森马（资产方） / 危总团队（属地资源 + LP） / 胡教授团队（运营 + 资源 GP）</a:t>
             </a:r>
           </a:p>
           <a:p>
@@ -4872,7 +5112,7 @@
               </a:defRPr>
             </a:pPr>
             <a:r>
-              <a:t>T+3 ~ T+6：仲量联行数据上架 / 第一批爬楼名单 200 家 / 首场科技开放麦</a:t>
+              <a:t>架构：合资公司持有元谷招商运营独家授权 + 共享配套直营权</a:t>
             </a:r>
           </a:p>
           <a:p>
@@ -4887,7 +5127,7 @@
               </a:defRPr>
             </a:pPr>
             <a:r>
-              <a:t>T+6 ~ T+9：两大产业牌照公开挂牌 / 追觅基金完成 1 期返投落地 5 家潮玩企业</a:t>
+              <a:t>股比建议：森马 51% / 危总 19% / 胡教授团队 30%（含期权池）</a:t>
             </a:r>
           </a:p>
           <a:p>
@@ -4902,7 +5142,7 @@
               </a:defRPr>
             </a:pPr>
             <a:r>
-              <a:t>T+9 ~ T+12：全国潮玩设计大赛决赛 / 福布斯榜单年度发布 / 央企总部签约 1–2 家</a:t>
+              <a:t>治理：3 人董事会，胡教授任首席战略运营官 (CSO)</a:t>
             </a:r>
           </a:p>
         </p:txBody>
@@ -5007,94 +5247,641 @@
               </a:defRPr>
             </a:pPr>
             <a:r>
-              <a:t>P15 三年产业目标</a:t>
-            </a:r>
-          </a:p>
-        </p:txBody>
-      </p:sp>
-      <p:sp>
-        <p:nvSpPr>
-          <p:cNvPr id="3" name="TextBox 2"/>
-          <p:cNvSpPr txBox="1"/>
+              <a:t>P13 收入结构 (v1.1 已含科技企业服务中心)</a:t>
+            </a:r>
+          </a:p>
+        </p:txBody>
+      </p:sp>
+      <p:graphicFrame>
+        <p:nvGraphicFramePr>
+          <p:cNvPr id="3" name="Table 2"/>
+          <p:cNvGraphicFramePr>
+            <a:graphicFrameLocks noGrp="1"/>
+          </p:cNvGraphicFramePr>
           <p:nvPr/>
-        </p:nvSpPr>
-        <p:spPr>
-          <a:xfrm>
-            <a:off x="548640" y="1097280"/>
-            <a:ext cx="11064240" cy="5212080"/>
-          </a:xfrm>
-          <a:prstGeom prst="rect">
-            <a:avLst/>
-          </a:prstGeom>
-          <a:noFill/>
-        </p:spPr>
-        <p:txBody>
-          <a:bodyPr wrap="square">
-            <a:spAutoFit/>
-          </a:bodyPr>
-          <a:lstStyle/>
-          <a:p>
-            <a:pPr>
-              <a:spcAft>
-                <a:spcPts val="600"/>
-              </a:spcAft>
-              <a:defRPr sz="1800" b="0">
-                <a:solidFill>
-                  <a:srgbClr val="1F2A44"/>
-                </a:solidFill>
-              </a:defRPr>
-            </a:pPr>
-            <a:r>
-              <a:t>入驻潮玩相关企业 ≥120 家，匹配 10/10/20/20/40 五档配比</a:t>
-            </a:r>
-          </a:p>
-          <a:p>
-            <a:pPr>
-              <a:spcAft>
-                <a:spcPts val="600"/>
-              </a:spcAft>
-              <a:defRPr sz="1800" b="0">
-                <a:solidFill>
-                  <a:srgbClr val="1F2A44"/>
-                </a:solidFill>
-              </a:defRPr>
-            </a:pPr>
-            <a:r>
-              <a:t>合资公司直营业态合计 ≥10,000㎡，三年内现金流自给</a:t>
-            </a:r>
-          </a:p>
-          <a:p>
-            <a:pPr>
-              <a:spcAft>
-                <a:spcPts val="600"/>
-              </a:spcAft>
-              <a:defRPr sz="1800" b="0">
-                <a:solidFill>
-                  <a:srgbClr val="1F2A44"/>
-                </a:solidFill>
-              </a:defRPr>
-            </a:pPr>
-            <a:r>
-              <a:t>元谷品牌曝光：年度活动 ≥30 场、媒体声量 ≥5 亿次、政府奖项 ≥6 项</a:t>
-            </a:r>
-          </a:p>
-          <a:p>
-            <a:pPr>
-              <a:spcAft>
-                <a:spcPts val="600"/>
-              </a:spcAft>
-              <a:defRPr sz="1800" b="0">
-                <a:solidFill>
-                  <a:srgbClr val="1F2A44"/>
-                </a:solidFill>
-              </a:defRPr>
-            </a:pPr>
-            <a:r>
-              <a:t>推动元谷成为上海“科技时尚特色小镇”运营标杆</a:t>
-            </a:r>
-          </a:p>
-        </p:txBody>
-      </p:sp>
+        </p:nvGraphicFramePr>
+        <p:xfrm>
+          <a:off x="548640" y="1097280"/>
+          <a:ext cx="11064240" cy="2926080"/>
+        </p:xfrm>
+        <a:graphic>
+          <a:graphicData uri="http://schemas.openxmlformats.org/drawingml/2006/table">
+            <a:tbl>
+              <a:tblPr firstRow="1" bandRow="1">
+                <a:tableStyleId>{5C22544A-7EE6-4342-B048-85BDC9FD1C3A}</a:tableStyleId>
+              </a:tblPr>
+              <a:tblGrid>
+                <a:gridCol w="2766060"/>
+                <a:gridCol w="2766060"/>
+                <a:gridCol w="2766060"/>
+                <a:gridCol w="2766060"/>
+              </a:tblGrid>
+              <a:tr h="418011">
+                <a:tc>
+                  <a:txBody>
+                    <a:bodyPr/>
+                    <a:lstStyle/>
+                    <a:p>
+                      <a:r>
+                        <a:rPr b="1" sz="1300">
+                          <a:solidFill>
+                            <a:srgbClr val="FFFFFF"/>
+                          </a:solidFill>
+                        </a:rPr>
+                        <a:t>收入类别</a:t>
+                      </a:r>
+                    </a:p>
+                  </a:txBody>
+                  <a:tcPr>
+                    <a:solidFill>
+                      <a:srgbClr val="142C5E"/>
+                    </a:solidFill>
+                  </a:tcPr>
+                </a:tc>
+                <a:tc>
+                  <a:txBody>
+                    <a:bodyPr/>
+                    <a:lstStyle/>
+                    <a:p>
+                      <a:r>
+                        <a:rPr b="1" sz="1300">
+                          <a:solidFill>
+                            <a:srgbClr val="FFFFFF"/>
+                          </a:solidFill>
+                        </a:rPr>
+                        <a:t>测算逻辑</a:t>
+                      </a:r>
+                    </a:p>
+                  </a:txBody>
+                  <a:tcPr>
+                    <a:solidFill>
+                      <a:srgbClr val="142C5E"/>
+                    </a:solidFill>
+                  </a:tcPr>
+                </a:tc>
+                <a:tc>
+                  <a:txBody>
+                    <a:bodyPr/>
+                    <a:lstStyle/>
+                    <a:p>
+                      <a:r>
+                        <a:rPr b="1" sz="1300">
+                          <a:solidFill>
+                            <a:srgbClr val="FFFFFF"/>
+                          </a:solidFill>
+                        </a:rPr>
+                        <a:t>支付方</a:t>
+                      </a:r>
+                    </a:p>
+                  </a:txBody>
+                  <a:tcPr>
+                    <a:solidFill>
+                      <a:srgbClr val="142C5E"/>
+                    </a:solidFill>
+                  </a:tcPr>
+                </a:tc>
+                <a:tc>
+                  <a:txBody>
+                    <a:bodyPr/>
+                    <a:lstStyle/>
+                    <a:p>
+                      <a:r>
+                        <a:rPr b="1" sz="1300">
+                          <a:solidFill>
+                            <a:srgbClr val="FFFFFF"/>
+                          </a:solidFill>
+                        </a:rPr>
+                        <a:t>结算节奏</a:t>
+                      </a:r>
+                    </a:p>
+                  </a:txBody>
+                  <a:tcPr>
+                    <a:solidFill>
+                      <a:srgbClr val="142C5E"/>
+                    </a:solidFill>
+                  </a:tcPr>
+                </a:tc>
+              </a:tr>
+              <a:tr h="418011">
+                <a:tc>
+                  <a:txBody>
+                    <a:bodyPr/>
+                    <a:lstStyle/>
+                    <a:p>
+                      <a:r>
+                        <a:rPr sz="1100">
+                          <a:solidFill>
+                            <a:srgbClr val="1F2A44"/>
+                          </a:solidFill>
+                        </a:rPr>
+                        <a:t>固定月费 Retainer</a:t>
+                      </a:r>
+                    </a:p>
+                  </a:txBody>
+                  <a:tcPr>
+                    <a:solidFill>
+                      <a:srgbClr val="F5F7FA"/>
+                    </a:solidFill>
+                  </a:tcPr>
+                </a:tc>
+                <a:tc>
+                  <a:txBody>
+                    <a:bodyPr/>
+                    <a:lstStyle/>
+                    <a:p>
+                      <a:r>
+                        <a:rPr sz="1100">
+                          <a:solidFill>
+                            <a:srgbClr val="1F2A44"/>
+                          </a:solidFill>
+                        </a:rPr>
+                        <a:t>20-35 万元/月 (推荐 28 万)</a:t>
+                      </a:r>
+                    </a:p>
+                  </a:txBody>
+                  <a:tcPr>
+                    <a:solidFill>
+                      <a:srgbClr val="F5F7FA"/>
+                    </a:solidFill>
+                  </a:tcPr>
+                </a:tc>
+                <a:tc>
+                  <a:txBody>
+                    <a:bodyPr/>
+                    <a:lstStyle/>
+                    <a:p>
+                      <a:r>
+                        <a:rPr sz="1100">
+                          <a:solidFill>
+                            <a:srgbClr val="1F2A44"/>
+                          </a:solidFill>
+                        </a:rPr>
+                        <a:t>甲方 (森马)</a:t>
+                      </a:r>
+                    </a:p>
+                  </a:txBody>
+                  <a:tcPr>
+                    <a:solidFill>
+                      <a:srgbClr val="F5F7FA"/>
+                    </a:solidFill>
+                  </a:tcPr>
+                </a:tc>
+                <a:tc>
+                  <a:txBody>
+                    <a:bodyPr/>
+                    <a:lstStyle/>
+                    <a:p>
+                      <a:r>
+                        <a:rPr sz="1100">
+                          <a:solidFill>
+                            <a:srgbClr val="1F2A44"/>
+                          </a:solidFill>
+                        </a:rPr>
+                        <a:t>按月</a:t>
+                      </a:r>
+                    </a:p>
+                  </a:txBody>
+                  <a:tcPr>
+                    <a:solidFill>
+                      <a:srgbClr val="F5F7FA"/>
+                    </a:solidFill>
+                  </a:tcPr>
+                </a:tc>
+              </a:tr>
+              <a:tr h="418011">
+                <a:tc>
+                  <a:txBody>
+                    <a:bodyPr/>
+                    <a:lstStyle/>
+                    <a:p>
+                      <a:r>
+                        <a:rPr sz="1100">
+                          <a:solidFill>
+                            <a:srgbClr val="1F2A44"/>
+                          </a:solidFill>
+                        </a:rPr>
+                        <a:t>招商佣金</a:t>
+                      </a:r>
+                    </a:p>
+                  </a:txBody>
+                  <a:tcPr>
+                    <a:solidFill>
+                      <a:srgbClr val="FFFFFF"/>
+                    </a:solidFill>
+                  </a:tcPr>
+                </a:tc>
+                <a:tc>
+                  <a:txBody>
+                    <a:bodyPr/>
+                    <a:lstStyle/>
+                    <a:p>
+                      <a:r>
+                        <a:rPr sz="1100">
+                          <a:solidFill>
+                            <a:srgbClr val="1F2A44"/>
+                          </a:solidFill>
+                        </a:rPr>
+                        <a:t>成交年租金的 1 / 1.5 / 2.5 个月</a:t>
+                      </a:r>
+                    </a:p>
+                  </a:txBody>
+                  <a:tcPr>
+                    <a:solidFill>
+                      <a:srgbClr val="FFFFFF"/>
+                    </a:solidFill>
+                  </a:tcPr>
+                </a:tc>
+                <a:tc>
+                  <a:txBody>
+                    <a:bodyPr/>
+                    <a:lstStyle/>
+                    <a:p>
+                      <a:r>
+                        <a:rPr sz="1100">
+                          <a:solidFill>
+                            <a:srgbClr val="1F2A44"/>
+                          </a:solidFill>
+                        </a:rPr>
+                        <a:t>甲方</a:t>
+                      </a:r>
+                    </a:p>
+                  </a:txBody>
+                  <a:tcPr>
+                    <a:solidFill>
+                      <a:srgbClr val="FFFFFF"/>
+                    </a:solidFill>
+                  </a:tcPr>
+                </a:tc>
+                <a:tc>
+                  <a:txBody>
+                    <a:bodyPr/>
+                    <a:lstStyle/>
+                    <a:p>
+                      <a:r>
+                        <a:rPr sz="1100">
+                          <a:solidFill>
+                            <a:srgbClr val="1F2A44"/>
+                          </a:solidFill>
+                        </a:rPr>
+                        <a:t>起租后</a:t>
+                      </a:r>
+                    </a:p>
+                  </a:txBody>
+                  <a:tcPr>
+                    <a:solidFill>
+                      <a:srgbClr val="FFFFFF"/>
+                    </a:solidFill>
+                  </a:tcPr>
+                </a:tc>
+              </a:tr>
+              <a:tr h="418011">
+                <a:tc>
+                  <a:txBody>
+                    <a:bodyPr/>
+                    <a:lstStyle/>
+                    <a:p>
+                      <a:r>
+                        <a:rPr sz="1100">
+                          <a:solidFill>
+                            <a:srgbClr val="1F2A44"/>
+                          </a:solidFill>
+                        </a:rPr>
+                        <a:t>活动运营收入</a:t>
+                      </a:r>
+                    </a:p>
+                  </a:txBody>
+                  <a:tcPr>
+                    <a:solidFill>
+                      <a:srgbClr val="F5F7FA"/>
+                    </a:solidFill>
+                  </a:tcPr>
+                </a:tc>
+                <a:tc>
+                  <a:txBody>
+                    <a:bodyPr/>
+                    <a:lstStyle/>
+                    <a:p>
+                      <a:r>
+                        <a:rPr sz="1100">
+                          <a:solidFill>
+                            <a:srgbClr val="1F2A44"/>
+                          </a:solidFill>
+                        </a:rPr>
+                        <a:t>单场净利分成</a:t>
+                      </a:r>
+                    </a:p>
+                  </a:txBody>
+                  <a:tcPr>
+                    <a:solidFill>
+                      <a:srgbClr val="F5F7FA"/>
+                    </a:solidFill>
+                  </a:tcPr>
+                </a:tc>
+                <a:tc>
+                  <a:txBody>
+                    <a:bodyPr/>
+                    <a:lstStyle/>
+                    <a:p>
+                      <a:r>
+                        <a:rPr sz="1100">
+                          <a:solidFill>
+                            <a:srgbClr val="1F2A44"/>
+                          </a:solidFill>
+                        </a:rPr>
+                        <a:t>外部+甲方</a:t>
+                      </a:r>
+                    </a:p>
+                  </a:txBody>
+                  <a:tcPr>
+                    <a:solidFill>
+                      <a:srgbClr val="F5F7FA"/>
+                    </a:solidFill>
+                  </a:tcPr>
+                </a:tc>
+                <a:tc>
+                  <a:txBody>
+                    <a:bodyPr/>
+                    <a:lstStyle/>
+                    <a:p>
+                      <a:r>
+                        <a:rPr sz="1100">
+                          <a:solidFill>
+                            <a:srgbClr val="1F2A44"/>
+                          </a:solidFill>
+                        </a:rPr>
+                        <a:t>按场</a:t>
+                      </a:r>
+                    </a:p>
+                  </a:txBody>
+                  <a:tcPr>
+                    <a:solidFill>
+                      <a:srgbClr val="F5F7FA"/>
+                    </a:solidFill>
+                  </a:tcPr>
+                </a:tc>
+              </a:tr>
+              <a:tr h="418011">
+                <a:tc>
+                  <a:txBody>
+                    <a:bodyPr/>
+                    <a:lstStyle/>
+                    <a:p>
+                      <a:r>
+                        <a:rPr sz="1100">
+                          <a:solidFill>
+                            <a:srgbClr val="1F2A44"/>
+                          </a:solidFill>
+                        </a:rPr>
+                        <a:t>专项奖项激励</a:t>
+                      </a:r>
+                    </a:p>
+                  </a:txBody>
+                  <a:tcPr>
+                    <a:solidFill>
+                      <a:srgbClr val="FFFFFF"/>
+                    </a:solidFill>
+                  </a:tcPr>
+                </a:tc>
+                <a:tc>
+                  <a:txBody>
+                    <a:bodyPr/>
+                    <a:lstStyle/>
+                    <a:p>
+                      <a:r>
+                        <a:rPr sz="1100">
+                          <a:solidFill>
+                            <a:srgbClr val="1F2A44"/>
+                          </a:solidFill>
+                        </a:rPr>
+                        <a:t>牌照 / 福布斯 / 小镇奖项一次性</a:t>
+                      </a:r>
+                    </a:p>
+                  </a:txBody>
+                  <a:tcPr>
+                    <a:solidFill>
+                      <a:srgbClr val="FFFFFF"/>
+                    </a:solidFill>
+                  </a:tcPr>
+                </a:tc>
+                <a:tc>
+                  <a:txBody>
+                    <a:bodyPr/>
+                    <a:lstStyle/>
+                    <a:p>
+                      <a:r>
+                        <a:rPr sz="1100">
+                          <a:solidFill>
+                            <a:srgbClr val="1F2A44"/>
+                          </a:solidFill>
+                        </a:rPr>
+                        <a:t>甲方</a:t>
+                      </a:r>
+                    </a:p>
+                  </a:txBody>
+                  <a:tcPr>
+                    <a:solidFill>
+                      <a:srgbClr val="FFFFFF"/>
+                    </a:solidFill>
+                  </a:tcPr>
+                </a:tc>
+                <a:tc>
+                  <a:txBody>
+                    <a:bodyPr/>
+                    <a:lstStyle/>
+                    <a:p>
+                      <a:r>
+                        <a:rPr sz="1100">
+                          <a:solidFill>
+                            <a:srgbClr val="1F2A44"/>
+                          </a:solidFill>
+                        </a:rPr>
+                        <a:t>按事件</a:t>
+                      </a:r>
+                    </a:p>
+                  </a:txBody>
+                  <a:tcPr>
+                    <a:solidFill>
+                      <a:srgbClr val="FFFFFF"/>
+                    </a:solidFill>
+                  </a:tcPr>
+                </a:tc>
+              </a:tr>
+              <a:tr h="418011">
+                <a:tc>
+                  <a:txBody>
+                    <a:bodyPr/>
+                    <a:lstStyle/>
+                    <a:p>
+                      <a:r>
+                        <a:rPr sz="1100">
+                          <a:solidFill>
+                            <a:srgbClr val="1F2A44"/>
+                          </a:solidFill>
+                        </a:rPr>
+                        <a:t>科技企业服务中心</a:t>
+                      </a:r>
+                    </a:p>
+                  </a:txBody>
+                  <a:tcPr>
+                    <a:solidFill>
+                      <a:srgbClr val="F5F7FA"/>
+                    </a:solidFill>
+                  </a:tcPr>
+                </a:tc>
+                <a:tc>
+                  <a:txBody>
+                    <a:bodyPr/>
+                    <a:lstStyle/>
+                    <a:p>
+                      <a:r>
+                        <a:rPr sz="1100">
+                          <a:solidFill>
+                            <a:srgbClr val="1F2A44"/>
+                          </a:solidFill>
+                        </a:rPr>
+                        <a:t>9 大类增值服务费</a:t>
+                      </a:r>
+                    </a:p>
+                  </a:txBody>
+                  <a:tcPr>
+                    <a:solidFill>
+                      <a:srgbClr val="F5F7FA"/>
+                    </a:solidFill>
+                  </a:tcPr>
+                </a:tc>
+                <a:tc>
+                  <a:txBody>
+                    <a:bodyPr/>
+                    <a:lstStyle/>
+                    <a:p>
+                      <a:r>
+                        <a:rPr sz="1100">
+                          <a:solidFill>
+                            <a:srgbClr val="1F2A44"/>
+                          </a:solidFill>
+                        </a:rPr>
+                        <a:t>外部入驻企业</a:t>
+                      </a:r>
+                    </a:p>
+                  </a:txBody>
+                  <a:tcPr>
+                    <a:solidFill>
+                      <a:srgbClr val="F5F7FA"/>
+                    </a:solidFill>
+                  </a:tcPr>
+                </a:tc>
+                <a:tc>
+                  <a:txBody>
+                    <a:bodyPr/>
+                    <a:lstStyle/>
+                    <a:p>
+                      <a:r>
+                        <a:rPr sz="1100">
+                          <a:solidFill>
+                            <a:srgbClr val="1F2A44"/>
+                          </a:solidFill>
+                        </a:rPr>
+                        <a:t>按服务</a:t>
+                      </a:r>
+                    </a:p>
+                  </a:txBody>
+                  <a:tcPr>
+                    <a:solidFill>
+                      <a:srgbClr val="F5F7FA"/>
+                    </a:solidFill>
+                  </a:tcPr>
+                </a:tc>
+              </a:tr>
+              <a:tr h="418014">
+                <a:tc>
+                  <a:txBody>
+                    <a:bodyPr/>
+                    <a:lstStyle/>
+                    <a:p>
+                      <a:r>
+                        <a:rPr sz="1100">
+                          <a:solidFill>
+                            <a:srgbClr val="1F2A44"/>
+                          </a:solidFill>
+                        </a:rPr>
+                        <a:t>股权分红</a:t>
+                      </a:r>
+                    </a:p>
+                  </a:txBody>
+                  <a:tcPr>
+                    <a:solidFill>
+                      <a:srgbClr val="FFFFFF"/>
+                    </a:solidFill>
+                  </a:tcPr>
+                </a:tc>
+                <a:tc>
+                  <a:txBody>
+                    <a:bodyPr/>
+                    <a:lstStyle/>
+                    <a:p>
+                      <a:r>
+                        <a:rPr sz="1100">
+                          <a:solidFill>
+                            <a:srgbClr val="1F2A44"/>
+                          </a:solidFill>
+                        </a:rPr>
+                        <a:t>合资公司净利 × 30% (含服务中心利润)</a:t>
+                      </a:r>
+                    </a:p>
+                  </a:txBody>
+                  <a:tcPr>
+                    <a:solidFill>
+                      <a:srgbClr val="FFFFFF"/>
+                    </a:solidFill>
+                  </a:tcPr>
+                </a:tc>
+                <a:tc>
+                  <a:txBody>
+                    <a:bodyPr/>
+                    <a:lstStyle/>
+                    <a:p>
+                      <a:r>
+                        <a:rPr sz="1100">
+                          <a:solidFill>
+                            <a:srgbClr val="1F2A44"/>
+                          </a:solidFill>
+                        </a:rPr>
+                        <a:t>合资公司</a:t>
+                      </a:r>
+                    </a:p>
+                  </a:txBody>
+                  <a:tcPr>
+                    <a:solidFill>
+                      <a:srgbClr val="FFFFFF"/>
+                    </a:solidFill>
+                  </a:tcPr>
+                </a:tc>
+                <a:tc>
+                  <a:txBody>
+                    <a:bodyPr/>
+                    <a:lstStyle/>
+                    <a:p>
+                      <a:r>
+                        <a:rPr sz="1100">
+                          <a:solidFill>
+                            <a:srgbClr val="1F2A44"/>
+                          </a:solidFill>
+                        </a:rPr>
+                        <a:t>年度</a:t>
+                      </a:r>
+                    </a:p>
+                  </a:txBody>
+                  <a:tcPr>
+                    <a:solidFill>
+                      <a:srgbClr val="FFFFFF"/>
+                    </a:solidFill>
+                  </a:tcPr>
+                </a:tc>
+              </a:tr>
+            </a:tbl>
+          </a:graphicData>
+        </a:graphic>
+      </p:graphicFrame>
       <p:sp>
         <p:nvSpPr>
           <p:cNvPr id="4" name="TextBox 3"/>
@@ -5195,257 +5982,94 @@
               </a:defRPr>
             </a:pPr>
             <a:r>
-              <a:t>P16 风险与对冲</a:t>
-            </a:r>
-          </a:p>
-        </p:txBody>
-      </p:sp>
-      <p:graphicFrame>
-        <p:nvGraphicFramePr>
-          <p:cNvPr id="3" name="Table 2"/>
-          <p:cNvGraphicFramePr>
-            <a:graphicFrameLocks noGrp="1"/>
-          </p:cNvGraphicFramePr>
+              <a:t>P14 第一年关键里程碑（T+0 → T+12）</a:t>
+            </a:r>
+          </a:p>
+        </p:txBody>
+      </p:sp>
+      <p:sp>
+        <p:nvSpPr>
+          <p:cNvPr id="3" name="TextBox 2"/>
+          <p:cNvSpPr txBox="1"/>
           <p:nvPr/>
-        </p:nvGraphicFramePr>
-        <p:xfrm>
-          <a:off x="548640" y="1188720"/>
-          <a:ext cx="11064240" cy="2103120"/>
-        </p:xfrm>
-        <a:graphic>
-          <a:graphicData uri="http://schemas.openxmlformats.org/drawingml/2006/table">
-            <a:tbl>
-              <a:tblPr firstRow="1" bandRow="1">
-                <a:tableStyleId>{5C22544A-7EE6-4342-B048-85BDC9FD1C3A}</a:tableStyleId>
-              </a:tblPr>
-              <a:tblGrid>
-                <a:gridCol w="5532120"/>
-                <a:gridCol w="5532120"/>
-              </a:tblGrid>
-              <a:tr h="420624">
-                <a:tc>
-                  <a:txBody>
-                    <a:bodyPr/>
-                    <a:lstStyle/>
-                    <a:p>
-                      <a:r>
-                        <a:rPr b="1" sz="1300">
-                          <a:solidFill>
-                            <a:srgbClr val="FFFFFF"/>
-                          </a:solidFill>
-                        </a:rPr>
-                        <a:t>风险</a:t>
-                      </a:r>
-                    </a:p>
-                  </a:txBody>
-                  <a:tcPr>
-                    <a:solidFill>
-                      <a:srgbClr val="142C5E"/>
-                    </a:solidFill>
-                  </a:tcPr>
-                </a:tc>
-                <a:tc>
-                  <a:txBody>
-                    <a:bodyPr/>
-                    <a:lstStyle/>
-                    <a:p>
-                      <a:r>
-                        <a:rPr b="1" sz="1300">
-                          <a:solidFill>
-                            <a:srgbClr val="FFFFFF"/>
-                          </a:solidFill>
-                        </a:rPr>
-                        <a:t>对冲机制</a:t>
-                      </a:r>
-                    </a:p>
-                  </a:txBody>
-                  <a:tcPr>
-                    <a:solidFill>
-                      <a:srgbClr val="142C5E"/>
-                    </a:solidFill>
-                  </a:tcPr>
-                </a:tc>
-              </a:tr>
-              <a:tr h="420624">
-                <a:tc>
-                  <a:txBody>
-                    <a:bodyPr/>
-                    <a:lstStyle/>
-                    <a:p>
-                      <a:r>
-                        <a:rPr sz="1100">
-                          <a:solidFill>
-                            <a:srgbClr val="1F2A44"/>
-                          </a:solidFill>
-                        </a:rPr>
-                        <a:t>招商节奏不及预期</a:t>
-                      </a:r>
-                    </a:p>
-                  </a:txBody>
-                  <a:tcPr>
-                    <a:solidFill>
-                      <a:srgbClr val="F5F7FA"/>
-                    </a:solidFill>
-                  </a:tcPr>
-                </a:tc>
-                <a:tc>
-                  <a:txBody>
-                    <a:bodyPr/>
-                    <a:lstStyle/>
-                    <a:p>
-                      <a:r>
-                        <a:rPr sz="1100">
-                          <a:solidFill>
-                            <a:srgbClr val="1F2A44"/>
-                          </a:solidFill>
-                        </a:rPr>
-                        <a:t>月费保底 + 阶梯佣金双轨</a:t>
-                      </a:r>
-                    </a:p>
-                  </a:txBody>
-                  <a:tcPr>
-                    <a:solidFill>
-                      <a:srgbClr val="F5F7FA"/>
-                    </a:solidFill>
-                  </a:tcPr>
-                </a:tc>
-              </a:tr>
-              <a:tr h="420624">
-                <a:tc>
-                  <a:txBody>
-                    <a:bodyPr/>
-                    <a:lstStyle/>
-                    <a:p>
-                      <a:r>
-                        <a:rPr sz="1100">
-                          <a:solidFill>
-                            <a:srgbClr val="1F2A44"/>
-                          </a:solidFill>
-                        </a:rPr>
-                        <a:t>基金返投落地不顺</a:t>
-                      </a:r>
-                    </a:p>
-                  </a:txBody>
-                  <a:tcPr>
-                    <a:solidFill>
-                      <a:srgbClr val="FFFFFF"/>
-                    </a:solidFill>
-                  </a:tcPr>
-                </a:tc>
-                <a:tc>
-                  <a:txBody>
-                    <a:bodyPr/>
-                    <a:lstStyle/>
-                    <a:p>
-                      <a:r>
-                        <a:rPr sz="1100">
-                          <a:solidFill>
-                            <a:srgbClr val="1F2A44"/>
-                          </a:solidFill>
-                        </a:rPr>
-                        <a:t>AI 腾讯生态导流作为 Plan B</a:t>
-                      </a:r>
-                    </a:p>
-                  </a:txBody>
-                  <a:tcPr>
-                    <a:solidFill>
-                      <a:srgbClr val="FFFFFF"/>
-                    </a:solidFill>
-                  </a:tcPr>
-                </a:tc>
-              </a:tr>
-              <a:tr h="420624">
-                <a:tc>
-                  <a:txBody>
-                    <a:bodyPr/>
-                    <a:lstStyle/>
-                    <a:p>
-                      <a:r>
-                        <a:rPr sz="1100">
-                          <a:solidFill>
-                            <a:srgbClr val="1F2A44"/>
-                          </a:solidFill>
-                        </a:rPr>
-                        <a:t>国际外事波动</a:t>
-                      </a:r>
-                    </a:p>
-                  </a:txBody>
-                  <a:tcPr>
-                    <a:solidFill>
-                      <a:srgbClr val="F5F7FA"/>
-                    </a:solidFill>
-                  </a:tcPr>
-                </a:tc>
-                <a:tc>
-                  <a:txBody>
-                    <a:bodyPr/>
-                    <a:lstStyle/>
-                    <a:p>
-                      <a:r>
-                        <a:rPr sz="1100">
-                          <a:solidFill>
-                            <a:srgbClr val="1F2A44"/>
-                          </a:solidFill>
-                        </a:rPr>
-                        <a:t>北欧 + 日韩 + 东南亚多线布局</a:t>
-                      </a:r>
-                    </a:p>
-                  </a:txBody>
-                  <a:tcPr>
-                    <a:solidFill>
-                      <a:srgbClr val="F5F7FA"/>
-                    </a:solidFill>
-                  </a:tcPr>
-                </a:tc>
-              </a:tr>
-              <a:tr h="420624">
-                <a:tc>
-                  <a:txBody>
-                    <a:bodyPr/>
-                    <a:lstStyle/>
-                    <a:p>
-                      <a:r>
-                        <a:rPr sz="1100">
-                          <a:solidFill>
-                            <a:srgbClr val="1F2A44"/>
-                          </a:solidFill>
-                        </a:rPr>
-                        <a:t>政府政策调整</a:t>
-                      </a:r>
-                    </a:p>
-                  </a:txBody>
-                  <a:tcPr>
-                    <a:solidFill>
-                      <a:srgbClr val="FFFFFF"/>
-                    </a:solidFill>
-                  </a:tcPr>
-                </a:tc>
-                <a:tc>
-                  <a:txBody>
-                    <a:bodyPr/>
-                    <a:lstStyle/>
-                    <a:p>
-                      <a:r>
-                        <a:rPr sz="1100">
-                          <a:solidFill>
-                            <a:srgbClr val="1F2A44"/>
-                          </a:solidFill>
-                        </a:rPr>
-                        <a:t>央企 + 行业协会牌照前置锁定</a:t>
-                      </a:r>
-                    </a:p>
-                  </a:txBody>
-                  <a:tcPr>
-                    <a:solidFill>
-                      <a:srgbClr val="FFFFFF"/>
-                    </a:solidFill>
-                  </a:tcPr>
-                </a:tc>
-              </a:tr>
-            </a:tbl>
-          </a:graphicData>
-        </a:graphic>
-      </p:graphicFrame>
+        </p:nvSpPr>
+        <p:spPr>
+          <a:xfrm>
+            <a:off x="548640" y="1097280"/>
+            <a:ext cx="11064240" cy="5212080"/>
+          </a:xfrm>
+          <a:prstGeom prst="rect">
+            <a:avLst/>
+          </a:prstGeom>
+          <a:noFill/>
+        </p:spPr>
+        <p:txBody>
+          <a:bodyPr wrap="square">
+            <a:spAutoFit/>
+          </a:bodyPr>
+          <a:lstStyle/>
+          <a:p>
+            <a:pPr>
+              <a:spcAft>
+                <a:spcPts val="600"/>
+              </a:spcAft>
+              <a:defRPr sz="1800" b="0">
+                <a:solidFill>
+                  <a:srgbClr val="1F2A44"/>
+                </a:solidFill>
+              </a:defRPr>
+            </a:pPr>
+            <a:r>
+              <a:t>T+0 ~ T+3：合资公司注册 / 月费起算 / 北欧会客厅签约入驻 4# 楼</a:t>
+            </a:r>
+          </a:p>
+          <a:p>
+            <a:pPr>
+              <a:spcAft>
+                <a:spcPts val="600"/>
+              </a:spcAft>
+              <a:defRPr sz="1800" b="0">
+                <a:solidFill>
+                  <a:srgbClr val="1F2A44"/>
+                </a:solidFill>
+              </a:defRPr>
+            </a:pPr>
+            <a:r>
+              <a:t>T+3 ~ T+6：仲量联行数据上架 / 第一批爬楼名单 200 家 / 首场科技开放麦</a:t>
+            </a:r>
+          </a:p>
+          <a:p>
+            <a:pPr>
+              <a:spcAft>
+                <a:spcPts val="600"/>
+              </a:spcAft>
+              <a:defRPr sz="1800" b="0">
+                <a:solidFill>
+                  <a:srgbClr val="1F2A44"/>
+                </a:solidFill>
+              </a:defRPr>
+            </a:pPr>
+            <a:r>
+              <a:t>T+6 ~ T+9：两大产业牌照公开挂牌 / 追觅基金完成 1 期返投落地 5 家潮玩企业</a:t>
+            </a:r>
+          </a:p>
+          <a:p>
+            <a:pPr>
+              <a:spcAft>
+                <a:spcPts val="600"/>
+              </a:spcAft>
+              <a:defRPr sz="1800" b="0">
+                <a:solidFill>
+                  <a:srgbClr val="1F2A44"/>
+                </a:solidFill>
+              </a:defRPr>
+            </a:pPr>
+            <a:r>
+              <a:t>T+9 ~ T+12：全国潮玩设计大赛决赛 / 福布斯榜单年度发布 / 央企总部签约 1–2 家</a:t>
+            </a:r>
+          </a:p>
+        </p:txBody>
+      </p:sp>
       <p:sp>
         <p:nvSpPr>
           <p:cNvPr id="4" name="TextBox 3"/>
@@ -5546,7 +6170,7 @@
               </a:defRPr>
             </a:pPr>
             <a:r>
-              <a:t>P17 团队配备（招聘计划）</a:t>
+              <a:t>P15 三年产业目标</a:t>
             </a:r>
           </a:p>
         </p:txBody>
@@ -5584,7 +6208,7 @@
               </a:defRPr>
             </a:pPr>
             <a:r>
-              <a:t>产业招商经理 × 1：仲量联行数据 + 爬楼 + 转化</a:t>
+              <a:t>入驻潮玩相关企业 ≥120 家，匹配 10/10/20/20/40 五档配比</a:t>
             </a:r>
           </a:p>
           <a:p>
@@ -5599,7 +6223,7 @@
               </a:defRPr>
             </a:pPr>
             <a:r>
-              <a:t>国际合作 &amp; 活动策划 × 1：北欧会客厅 + 科技开放麦</a:t>
+              <a:t>合资公司直营业态合计 ≥10,000㎡，三年内现金流自给</a:t>
             </a:r>
           </a:p>
           <a:p>
@@ -5614,7 +6238,7 @@
               </a:defRPr>
             </a:pPr>
             <a:r>
-              <a:t>基金投后 &amp; 政府关系 × 1：追觅基金返投 + 牌照申报</a:t>
+              <a:t>元谷品牌曝光：年度活动 ≥30 场、媒体声量 ≥5 亿次、政府奖项 ≥6 项</a:t>
             </a:r>
           </a:p>
           <a:p>
@@ -5629,22 +6253,7 @@
               </a:defRPr>
             </a:pPr>
             <a:r>
-              <a:t>胡教授（CSO，每周不少于 2 个工作日）</a:t>
-            </a:r>
-          </a:p>
-          <a:p>
-            <a:pPr>
-              <a:spcAft>
-                <a:spcPts val="600"/>
-              </a:spcAft>
-              <a:defRPr sz="1800" b="0">
-                <a:solidFill>
-                  <a:srgbClr val="1F2A44"/>
-                </a:solidFill>
-              </a:defRPr>
-            </a:pPr>
-            <a:r>
-              <a:t>1 名行政 / 财务（合资公司共享）</a:t>
+              <a:t>推动元谷成为上海“科技时尚特色小镇”运营标杆</a:t>
             </a:r>
           </a:p>
         </p:txBody>
@@ -5749,109 +6358,257 @@
               </a:defRPr>
             </a:pPr>
             <a:r>
-              <a:t>P18 我们的承诺（写进协议）</a:t>
-            </a:r>
-          </a:p>
-        </p:txBody>
-      </p:sp>
-      <p:sp>
-        <p:nvSpPr>
-          <p:cNvPr id="3" name="TextBox 2"/>
-          <p:cNvSpPr txBox="1"/>
+              <a:t>P16 风险与对冲</a:t>
+            </a:r>
+          </a:p>
+        </p:txBody>
+      </p:sp>
+      <p:graphicFrame>
+        <p:nvGraphicFramePr>
+          <p:cNvPr id="3" name="Table 2"/>
+          <p:cNvGraphicFramePr>
+            <a:graphicFrameLocks noGrp="1"/>
+          </p:cNvGraphicFramePr>
           <p:nvPr/>
-        </p:nvSpPr>
-        <p:spPr>
-          <a:xfrm>
-            <a:off x="548640" y="1097280"/>
-            <a:ext cx="11064240" cy="5212080"/>
-          </a:xfrm>
-          <a:prstGeom prst="rect">
-            <a:avLst/>
-          </a:prstGeom>
-          <a:noFill/>
-        </p:spPr>
-        <p:txBody>
-          <a:bodyPr wrap="square">
-            <a:spAutoFit/>
-          </a:bodyPr>
-          <a:lstStyle/>
-          <a:p>
-            <a:pPr>
-              <a:spcAft>
-                <a:spcPts val="600"/>
-              </a:spcAft>
-              <a:defRPr sz="1800" b="0">
-                <a:solidFill>
-                  <a:srgbClr val="1F2A44"/>
-                </a:solidFill>
-              </a:defRPr>
-            </a:pPr>
-            <a:r>
-              <a:t>北欧创新国际会客厅元谷站 12 个月内挂牌运营</a:t>
-            </a:r>
-          </a:p>
-          <a:p>
-            <a:pPr>
-              <a:spcAft>
-                <a:spcPts val="600"/>
-              </a:spcAft>
-              <a:defRPr sz="1800" b="0">
-                <a:solidFill>
-                  <a:srgbClr val="1F2A44"/>
-                </a:solidFill>
-              </a:defRPr>
-            </a:pPr>
-            <a:r>
-              <a:t>仲量联行爬楼数据 90 天内接入合资公司中台</a:t>
-            </a:r>
-          </a:p>
-          <a:p>
-            <a:pPr>
-              <a:spcAft>
-                <a:spcPts val="600"/>
-              </a:spcAft>
-              <a:defRPr sz="1800" b="0">
-                <a:solidFill>
-                  <a:srgbClr val="1F2A44"/>
-                </a:solidFill>
-              </a:defRPr>
-            </a:pPr>
-            <a:r>
-              <a:t>追觅基金 12 个月内完成首期返投落地 ≥3 家潮玩企业</a:t>
-            </a:r>
-          </a:p>
-          <a:p>
-            <a:pPr>
-              <a:spcAft>
-                <a:spcPts val="600"/>
-              </a:spcAft>
-              <a:defRPr sz="1800" b="0">
-                <a:solidFill>
-                  <a:srgbClr val="1F2A44"/>
-                </a:solidFill>
-              </a:defRPr>
-            </a:pPr>
-            <a:r>
-              <a:t>福布斯榜单 / 行业牌照 12 个月内挂牌 ≥2 项</a:t>
-            </a:r>
-          </a:p>
-          <a:p>
-            <a:pPr>
-              <a:spcAft>
-                <a:spcPts val="600"/>
-              </a:spcAft>
-              <a:defRPr sz="1800" b="0">
-                <a:solidFill>
-                  <a:srgbClr val="1F2A44"/>
-                </a:solidFill>
-              </a:defRPr>
-            </a:pPr>
-            <a:r>
-              <a:t>科技开放麦 12 个月内办 ≥10 场</a:t>
-            </a:r>
-          </a:p>
-        </p:txBody>
-      </p:sp>
+        </p:nvGraphicFramePr>
+        <p:xfrm>
+          <a:off x="548640" y="1188720"/>
+          <a:ext cx="11064240" cy="2103120"/>
+        </p:xfrm>
+        <a:graphic>
+          <a:graphicData uri="http://schemas.openxmlformats.org/drawingml/2006/table">
+            <a:tbl>
+              <a:tblPr firstRow="1" bandRow="1">
+                <a:tableStyleId>{5C22544A-7EE6-4342-B048-85BDC9FD1C3A}</a:tableStyleId>
+              </a:tblPr>
+              <a:tblGrid>
+                <a:gridCol w="5532120"/>
+                <a:gridCol w="5532120"/>
+              </a:tblGrid>
+              <a:tr h="420624">
+                <a:tc>
+                  <a:txBody>
+                    <a:bodyPr/>
+                    <a:lstStyle/>
+                    <a:p>
+                      <a:r>
+                        <a:rPr b="1" sz="1300">
+                          <a:solidFill>
+                            <a:srgbClr val="FFFFFF"/>
+                          </a:solidFill>
+                        </a:rPr>
+                        <a:t>风险</a:t>
+                      </a:r>
+                    </a:p>
+                  </a:txBody>
+                  <a:tcPr>
+                    <a:solidFill>
+                      <a:srgbClr val="142C5E"/>
+                    </a:solidFill>
+                  </a:tcPr>
+                </a:tc>
+                <a:tc>
+                  <a:txBody>
+                    <a:bodyPr/>
+                    <a:lstStyle/>
+                    <a:p>
+                      <a:r>
+                        <a:rPr b="1" sz="1300">
+                          <a:solidFill>
+                            <a:srgbClr val="FFFFFF"/>
+                          </a:solidFill>
+                        </a:rPr>
+                        <a:t>对冲机制</a:t>
+                      </a:r>
+                    </a:p>
+                  </a:txBody>
+                  <a:tcPr>
+                    <a:solidFill>
+                      <a:srgbClr val="142C5E"/>
+                    </a:solidFill>
+                  </a:tcPr>
+                </a:tc>
+              </a:tr>
+              <a:tr h="420624">
+                <a:tc>
+                  <a:txBody>
+                    <a:bodyPr/>
+                    <a:lstStyle/>
+                    <a:p>
+                      <a:r>
+                        <a:rPr sz="1100">
+                          <a:solidFill>
+                            <a:srgbClr val="1F2A44"/>
+                          </a:solidFill>
+                        </a:rPr>
+                        <a:t>招商节奏不及预期</a:t>
+                      </a:r>
+                    </a:p>
+                  </a:txBody>
+                  <a:tcPr>
+                    <a:solidFill>
+                      <a:srgbClr val="F5F7FA"/>
+                    </a:solidFill>
+                  </a:tcPr>
+                </a:tc>
+                <a:tc>
+                  <a:txBody>
+                    <a:bodyPr/>
+                    <a:lstStyle/>
+                    <a:p>
+                      <a:r>
+                        <a:rPr sz="1100">
+                          <a:solidFill>
+                            <a:srgbClr val="1F2A44"/>
+                          </a:solidFill>
+                        </a:rPr>
+                        <a:t>月费保底 + 阶梯佣金双轨</a:t>
+                      </a:r>
+                    </a:p>
+                  </a:txBody>
+                  <a:tcPr>
+                    <a:solidFill>
+                      <a:srgbClr val="F5F7FA"/>
+                    </a:solidFill>
+                  </a:tcPr>
+                </a:tc>
+              </a:tr>
+              <a:tr h="420624">
+                <a:tc>
+                  <a:txBody>
+                    <a:bodyPr/>
+                    <a:lstStyle/>
+                    <a:p>
+                      <a:r>
+                        <a:rPr sz="1100">
+                          <a:solidFill>
+                            <a:srgbClr val="1F2A44"/>
+                          </a:solidFill>
+                        </a:rPr>
+                        <a:t>基金返投落地不顺</a:t>
+                      </a:r>
+                    </a:p>
+                  </a:txBody>
+                  <a:tcPr>
+                    <a:solidFill>
+                      <a:srgbClr val="FFFFFF"/>
+                    </a:solidFill>
+                  </a:tcPr>
+                </a:tc>
+                <a:tc>
+                  <a:txBody>
+                    <a:bodyPr/>
+                    <a:lstStyle/>
+                    <a:p>
+                      <a:r>
+                        <a:rPr sz="1100">
+                          <a:solidFill>
+                            <a:srgbClr val="1F2A44"/>
+                          </a:solidFill>
+                        </a:rPr>
+                        <a:t>AI 腾讯生态导流作为 Plan B</a:t>
+                      </a:r>
+                    </a:p>
+                  </a:txBody>
+                  <a:tcPr>
+                    <a:solidFill>
+                      <a:srgbClr val="FFFFFF"/>
+                    </a:solidFill>
+                  </a:tcPr>
+                </a:tc>
+              </a:tr>
+              <a:tr h="420624">
+                <a:tc>
+                  <a:txBody>
+                    <a:bodyPr/>
+                    <a:lstStyle/>
+                    <a:p>
+                      <a:r>
+                        <a:rPr sz="1100">
+                          <a:solidFill>
+                            <a:srgbClr val="1F2A44"/>
+                          </a:solidFill>
+                        </a:rPr>
+                        <a:t>国际外事波动</a:t>
+                      </a:r>
+                    </a:p>
+                  </a:txBody>
+                  <a:tcPr>
+                    <a:solidFill>
+                      <a:srgbClr val="F5F7FA"/>
+                    </a:solidFill>
+                  </a:tcPr>
+                </a:tc>
+                <a:tc>
+                  <a:txBody>
+                    <a:bodyPr/>
+                    <a:lstStyle/>
+                    <a:p>
+                      <a:r>
+                        <a:rPr sz="1100">
+                          <a:solidFill>
+                            <a:srgbClr val="1F2A44"/>
+                          </a:solidFill>
+                        </a:rPr>
+                        <a:t>北欧 + 日韩 + 东南亚多线布局</a:t>
+                      </a:r>
+                    </a:p>
+                  </a:txBody>
+                  <a:tcPr>
+                    <a:solidFill>
+                      <a:srgbClr val="F5F7FA"/>
+                    </a:solidFill>
+                  </a:tcPr>
+                </a:tc>
+              </a:tr>
+              <a:tr h="420624">
+                <a:tc>
+                  <a:txBody>
+                    <a:bodyPr/>
+                    <a:lstStyle/>
+                    <a:p>
+                      <a:r>
+                        <a:rPr sz="1100">
+                          <a:solidFill>
+                            <a:srgbClr val="1F2A44"/>
+                          </a:solidFill>
+                        </a:rPr>
+                        <a:t>政府政策调整</a:t>
+                      </a:r>
+                    </a:p>
+                  </a:txBody>
+                  <a:tcPr>
+                    <a:solidFill>
+                      <a:srgbClr val="FFFFFF"/>
+                    </a:solidFill>
+                  </a:tcPr>
+                </a:tc>
+                <a:tc>
+                  <a:txBody>
+                    <a:bodyPr/>
+                    <a:lstStyle/>
+                    <a:p>
+                      <a:r>
+                        <a:rPr sz="1100">
+                          <a:solidFill>
+                            <a:srgbClr val="1F2A44"/>
+                          </a:solidFill>
+                        </a:rPr>
+                        <a:t>央企 + 行业协会牌照前置锁定</a:t>
+                      </a:r>
+                    </a:p>
+                  </a:txBody>
+                  <a:tcPr>
+                    <a:solidFill>
+                      <a:srgbClr val="FFFFFF"/>
+                    </a:solidFill>
+                  </a:tcPr>
+                </a:tc>
+              </a:tr>
+            </a:tbl>
+          </a:graphicData>
+        </a:graphic>
+      </p:graphicFrame>
       <p:sp>
         <p:nvSpPr>
           <p:cNvPr id="4" name="TextBox 3"/>
@@ -5952,7 +6709,7 @@
               </a:defRPr>
             </a:pPr>
             <a:r>
-              <a:t>P19 我们希望森马的承诺</a:t>
+              <a:t>P17 团队配备（招聘计划）</a:t>
             </a:r>
           </a:p>
         </p:txBody>
@@ -5990,7 +6747,7 @@
               </a:defRPr>
             </a:pPr>
             <a:r>
-              <a:t>授予合资公司独家招商运营权（5 年）</a:t>
+              <a:t>产业招商经理 × 1：仲量联行数据 + 爬楼 + 转化</a:t>
             </a:r>
           </a:p>
           <a:p>
@@ -6005,7 +6762,7 @@
               </a:defRPr>
             </a:pPr>
             <a:r>
-              <a:t>商业可租面积 5.2 万㎡ 招商主导权</a:t>
+              <a:t>国际合作 &amp; 活动策划 × 1：北欧会客厅 + 科技开放麦</a:t>
             </a:r>
           </a:p>
           <a:p>
@@ -6020,7 +6777,7 @@
               </a:defRPr>
             </a:pPr>
             <a:r>
-              <a:t>共享配套（直播 / 选品 / 设计中心）由合资公司直营</a:t>
+              <a:t>基金投后 &amp; 政府关系 × 1：追觅基金返投 + 牌照申报</a:t>
             </a:r>
           </a:p>
           <a:p>
@@ -6035,7 +6792,7 @@
               </a:defRPr>
             </a:pPr>
             <a:r>
-              <a:t>月费保底 + 招商佣金 + 奖项激励 + 股权分红组合</a:t>
+              <a:t>胡教授（CSO，每周不少于 2 个工作日）</a:t>
             </a:r>
           </a:p>
           <a:p>
@@ -6050,7 +6807,7 @@
               </a:defRPr>
             </a:pPr>
             <a:r>
-              <a:t>政府关系联合体由森马牵头、合资公司执行</a:t>
+              <a:t>1 名行政 / 财务（合资公司共享）</a:t>
             </a:r>
           </a:p>
         </p:txBody>
@@ -6445,563 +7202,21 @@
               </a:defRPr>
             </a:pPr>
             <a:r>
-              <a:t>P20 测算速览（详见 Excel）</a:t>
-            </a:r>
-          </a:p>
-        </p:txBody>
-      </p:sp>
-      <p:graphicFrame>
-        <p:nvGraphicFramePr>
-          <p:cNvPr id="3" name="Table 2"/>
-          <p:cNvGraphicFramePr>
-            <a:graphicFrameLocks noGrp="1"/>
-          </p:cNvGraphicFramePr>
-          <p:nvPr/>
-        </p:nvGraphicFramePr>
-        <p:xfrm>
-          <a:off x="548640" y="1188720"/>
-          <a:ext cx="11064240" cy="1691640"/>
-        </p:xfrm>
-        <a:graphic>
-          <a:graphicData uri="http://schemas.openxmlformats.org/drawingml/2006/table">
-            <a:tbl>
-              <a:tblPr firstRow="1" bandRow="1">
-                <a:tableStyleId>{5C22544A-7EE6-4342-B048-85BDC9FD1C3A}</a:tableStyleId>
-              </a:tblPr>
-              <a:tblGrid>
-                <a:gridCol w="1844040"/>
-                <a:gridCol w="1844040"/>
-                <a:gridCol w="1844040"/>
-                <a:gridCol w="1844040"/>
-                <a:gridCol w="1844040"/>
-                <a:gridCol w="1844040"/>
-              </a:tblGrid>
-              <a:tr h="422910">
-                <a:tc>
-                  <a:txBody>
-                    <a:bodyPr/>
-                    <a:lstStyle/>
-                    <a:p>
-                      <a:r>
-                        <a:rPr b="1" sz="1300">
-                          <a:solidFill>
-                            <a:srgbClr val="FFFFFF"/>
-                          </a:solidFill>
-                        </a:rPr>
-                        <a:t>场景</a:t>
-                      </a:r>
-                    </a:p>
-                  </a:txBody>
-                  <a:tcPr>
-                    <a:solidFill>
-                      <a:srgbClr val="142C5E"/>
-                    </a:solidFill>
-                  </a:tcPr>
-                </a:tc>
-                <a:tc>
-                  <a:txBody>
-                    <a:bodyPr/>
-                    <a:lstStyle/>
-                    <a:p>
-                      <a:r>
-                        <a:rPr b="1" sz="1300">
-                          <a:solidFill>
-                            <a:srgbClr val="FFFFFF"/>
-                          </a:solidFill>
-                        </a:rPr>
-                        <a:t>月费 (年化)</a:t>
-                      </a:r>
-                    </a:p>
-                  </a:txBody>
-                  <a:tcPr>
-                    <a:solidFill>
-                      <a:srgbClr val="142C5E"/>
-                    </a:solidFill>
-                  </a:tcPr>
-                </a:tc>
-                <a:tc>
-                  <a:txBody>
-                    <a:bodyPr/>
-                    <a:lstStyle/>
-                    <a:p>
-                      <a:r>
-                        <a:rPr b="1" sz="1300">
-                          <a:solidFill>
-                            <a:srgbClr val="FFFFFF"/>
-                          </a:solidFill>
-                        </a:rPr>
-                        <a:t>招商佣金</a:t>
-                      </a:r>
-                    </a:p>
-                  </a:txBody>
-                  <a:tcPr>
-                    <a:solidFill>
-                      <a:srgbClr val="142C5E"/>
-                    </a:solidFill>
-                  </a:tcPr>
-                </a:tc>
-                <a:tc>
-                  <a:txBody>
-                    <a:bodyPr/>
-                    <a:lstStyle/>
-                    <a:p>
-                      <a:r>
-                        <a:rPr b="1" sz="1300">
-                          <a:solidFill>
-                            <a:srgbClr val="FFFFFF"/>
-                          </a:solidFill>
-                        </a:rPr>
-                        <a:t>活动 + 奖项</a:t>
-                      </a:r>
-                    </a:p>
-                  </a:txBody>
-                  <a:tcPr>
-                    <a:solidFill>
-                      <a:srgbClr val="142C5E"/>
-                    </a:solidFill>
-                  </a:tcPr>
-                </a:tc>
-                <a:tc>
-                  <a:txBody>
-                    <a:bodyPr/>
-                    <a:lstStyle/>
-                    <a:p>
-                      <a:r>
-                        <a:rPr b="1" sz="1300">
-                          <a:solidFill>
-                            <a:srgbClr val="FFFFFF"/>
-                          </a:solidFill>
-                        </a:rPr>
-                        <a:t>股权分红</a:t>
-                      </a:r>
-                    </a:p>
-                  </a:txBody>
-                  <a:tcPr>
-                    <a:solidFill>
-                      <a:srgbClr val="142C5E"/>
-                    </a:solidFill>
-                  </a:tcPr>
-                </a:tc>
-                <a:tc>
-                  <a:txBody>
-                    <a:bodyPr/>
-                    <a:lstStyle/>
-                    <a:p>
-                      <a:r>
-                        <a:rPr b="1" sz="1300">
-                          <a:solidFill>
-                            <a:srgbClr val="FFFFFF"/>
-                          </a:solidFill>
-                        </a:rPr>
-                        <a:t>首年合计</a:t>
-                      </a:r>
-                    </a:p>
-                  </a:txBody>
-                  <a:tcPr>
-                    <a:solidFill>
-                      <a:srgbClr val="142C5E"/>
-                    </a:solidFill>
-                  </a:tcPr>
-                </a:tc>
-              </a:tr>
-              <a:tr h="422910">
-                <a:tc>
-                  <a:txBody>
-                    <a:bodyPr/>
-                    <a:lstStyle/>
-                    <a:p>
-                      <a:r>
-                        <a:rPr sz="1100">
-                          <a:solidFill>
-                            <a:srgbClr val="1F2A44"/>
-                          </a:solidFill>
-                        </a:rPr>
-                        <a:t>保守</a:t>
-                      </a:r>
-                    </a:p>
-                  </a:txBody>
-                  <a:tcPr>
-                    <a:solidFill>
-                      <a:srgbClr val="F5F7FA"/>
-                    </a:solidFill>
-                  </a:tcPr>
-                </a:tc>
-                <a:tc>
-                  <a:txBody>
-                    <a:bodyPr/>
-                    <a:lstStyle/>
-                    <a:p>
-                      <a:r>
-                        <a:rPr sz="1100">
-                          <a:solidFill>
-                            <a:srgbClr val="1F2A44"/>
-                          </a:solidFill>
-                        </a:rPr>
-                        <a:t>360 万</a:t>
-                      </a:r>
-                    </a:p>
-                  </a:txBody>
-                  <a:tcPr>
-                    <a:solidFill>
-                      <a:srgbClr val="F5F7FA"/>
-                    </a:solidFill>
-                  </a:tcPr>
-                </a:tc>
-                <a:tc>
-                  <a:txBody>
-                    <a:bodyPr/>
-                    <a:lstStyle/>
-                    <a:p>
-                      <a:r>
-                        <a:rPr sz="1100">
-                          <a:solidFill>
-                            <a:srgbClr val="1F2A44"/>
-                          </a:solidFill>
-                        </a:rPr>
-                        <a:t>300 万</a:t>
-                      </a:r>
-                    </a:p>
-                  </a:txBody>
-                  <a:tcPr>
-                    <a:solidFill>
-                      <a:srgbClr val="F5F7FA"/>
-                    </a:solidFill>
-                  </a:tcPr>
-                </a:tc>
-                <a:tc>
-                  <a:txBody>
-                    <a:bodyPr/>
-                    <a:lstStyle/>
-                    <a:p>
-                      <a:r>
-                        <a:rPr sz="1100">
-                          <a:solidFill>
-                            <a:srgbClr val="1F2A44"/>
-                          </a:solidFill>
-                        </a:rPr>
-                        <a:t>240 万</a:t>
-                      </a:r>
-                    </a:p>
-                  </a:txBody>
-                  <a:tcPr>
-                    <a:solidFill>
-                      <a:srgbClr val="F5F7FA"/>
-                    </a:solidFill>
-                  </a:tcPr>
-                </a:tc>
-                <a:tc>
-                  <a:txBody>
-                    <a:bodyPr/>
-                    <a:lstStyle/>
-                    <a:p>
-                      <a:r>
-                        <a:rPr sz="1100">
-                          <a:solidFill>
-                            <a:srgbClr val="1F2A44"/>
-                          </a:solidFill>
-                        </a:rPr>
-                        <a:t>60 万</a:t>
-                      </a:r>
-                    </a:p>
-                  </a:txBody>
-                  <a:tcPr>
-                    <a:solidFill>
-                      <a:srgbClr val="F5F7FA"/>
-                    </a:solidFill>
-                  </a:tcPr>
-                </a:tc>
-                <a:tc>
-                  <a:txBody>
-                    <a:bodyPr/>
-                    <a:lstStyle/>
-                    <a:p>
-                      <a:r>
-                        <a:rPr sz="1100">
-                          <a:solidFill>
-                            <a:srgbClr val="1F2A44"/>
-                          </a:solidFill>
-                        </a:rPr>
-                        <a:t>≈ 960 万元</a:t>
-                      </a:r>
-                    </a:p>
-                  </a:txBody>
-                  <a:tcPr>
-                    <a:solidFill>
-                      <a:srgbClr val="F5F7FA"/>
-                    </a:solidFill>
-                  </a:tcPr>
-                </a:tc>
-              </a:tr>
-              <a:tr h="422910">
-                <a:tc>
-                  <a:txBody>
-                    <a:bodyPr/>
-                    <a:lstStyle/>
-                    <a:p>
-                      <a:r>
-                        <a:rPr sz="1100">
-                          <a:solidFill>
-                            <a:srgbClr val="1F2A44"/>
-                          </a:solidFill>
-                        </a:rPr>
-                        <a:t>基础</a:t>
-                      </a:r>
-                    </a:p>
-                  </a:txBody>
-                  <a:tcPr>
-                    <a:solidFill>
-                      <a:srgbClr val="FFFFFF"/>
-                    </a:solidFill>
-                  </a:tcPr>
-                </a:tc>
-                <a:tc>
-                  <a:txBody>
-                    <a:bodyPr/>
-                    <a:lstStyle/>
-                    <a:p>
-                      <a:r>
-                        <a:rPr sz="1100">
-                          <a:solidFill>
-                            <a:srgbClr val="1F2A44"/>
-                          </a:solidFill>
-                        </a:rPr>
-                        <a:t>480 万</a:t>
-                      </a:r>
-                    </a:p>
-                  </a:txBody>
-                  <a:tcPr>
-                    <a:solidFill>
-                      <a:srgbClr val="FFFFFF"/>
-                    </a:solidFill>
-                  </a:tcPr>
-                </a:tc>
-                <a:tc>
-                  <a:txBody>
-                    <a:bodyPr/>
-                    <a:lstStyle/>
-                    <a:p>
-                      <a:r>
-                        <a:rPr sz="1100">
-                          <a:solidFill>
-                            <a:srgbClr val="1F2A44"/>
-                          </a:solidFill>
-                        </a:rPr>
-                        <a:t>600 万</a:t>
-                      </a:r>
-                    </a:p>
-                  </a:txBody>
-                  <a:tcPr>
-                    <a:solidFill>
-                      <a:srgbClr val="FFFFFF"/>
-                    </a:solidFill>
-                  </a:tcPr>
-                </a:tc>
-                <a:tc>
-                  <a:txBody>
-                    <a:bodyPr/>
-                    <a:lstStyle/>
-                    <a:p>
-                      <a:r>
-                        <a:rPr sz="1100">
-                          <a:solidFill>
-                            <a:srgbClr val="1F2A44"/>
-                          </a:solidFill>
-                        </a:rPr>
-                        <a:t>390 万</a:t>
-                      </a:r>
-                    </a:p>
-                  </a:txBody>
-                  <a:tcPr>
-                    <a:solidFill>
-                      <a:srgbClr val="FFFFFF"/>
-                    </a:solidFill>
-                  </a:tcPr>
-                </a:tc>
-                <a:tc>
-                  <a:txBody>
-                    <a:bodyPr/>
-                    <a:lstStyle/>
-                    <a:p>
-                      <a:r>
-                        <a:rPr sz="1100">
-                          <a:solidFill>
-                            <a:srgbClr val="1F2A44"/>
-                          </a:solidFill>
-                        </a:rPr>
-                        <a:t>120 万</a:t>
-                      </a:r>
-                    </a:p>
-                  </a:txBody>
-                  <a:tcPr>
-                    <a:solidFill>
-                      <a:srgbClr val="FFFFFF"/>
-                    </a:solidFill>
-                  </a:tcPr>
-                </a:tc>
-                <a:tc>
-                  <a:txBody>
-                    <a:bodyPr/>
-                    <a:lstStyle/>
-                    <a:p>
-                      <a:r>
-                        <a:rPr sz="1100">
-                          <a:solidFill>
-                            <a:srgbClr val="1F2A44"/>
-                          </a:solidFill>
-                        </a:rPr>
-                        <a:t>≈ 1,590 万元</a:t>
-                      </a:r>
-                    </a:p>
-                  </a:txBody>
-                  <a:tcPr>
-                    <a:solidFill>
-                      <a:srgbClr val="FFFFFF"/>
-                    </a:solidFill>
-                  </a:tcPr>
-                </a:tc>
-              </a:tr>
-              <a:tr h="422910">
-                <a:tc>
-                  <a:txBody>
-                    <a:bodyPr/>
-                    <a:lstStyle/>
-                    <a:p>
-                      <a:r>
-                        <a:rPr sz="1100">
-                          <a:solidFill>
-                            <a:srgbClr val="1F2A44"/>
-                          </a:solidFill>
-                        </a:rPr>
-                        <a:t>乐观</a:t>
-                      </a:r>
-                    </a:p>
-                  </a:txBody>
-                  <a:tcPr>
-                    <a:solidFill>
-                      <a:srgbClr val="F5F7FA"/>
-                    </a:solidFill>
-                  </a:tcPr>
-                </a:tc>
-                <a:tc>
-                  <a:txBody>
-                    <a:bodyPr/>
-                    <a:lstStyle/>
-                    <a:p>
-                      <a:r>
-                        <a:rPr sz="1100">
-                          <a:solidFill>
-                            <a:srgbClr val="1F2A44"/>
-                          </a:solidFill>
-                        </a:rPr>
-                        <a:t>600 万</a:t>
-                      </a:r>
-                    </a:p>
-                  </a:txBody>
-                  <a:tcPr>
-                    <a:solidFill>
-                      <a:srgbClr val="F5F7FA"/>
-                    </a:solidFill>
-                  </a:tcPr>
-                </a:tc>
-                <a:tc>
-                  <a:txBody>
-                    <a:bodyPr/>
-                    <a:lstStyle/>
-                    <a:p>
-                      <a:r>
-                        <a:rPr sz="1100">
-                          <a:solidFill>
-                            <a:srgbClr val="1F2A44"/>
-                          </a:solidFill>
-                        </a:rPr>
-                        <a:t>1,200 万</a:t>
-                      </a:r>
-                    </a:p>
-                  </a:txBody>
-                  <a:tcPr>
-                    <a:solidFill>
-                      <a:srgbClr val="F5F7FA"/>
-                    </a:solidFill>
-                  </a:tcPr>
-                </a:tc>
-                <a:tc>
-                  <a:txBody>
-                    <a:bodyPr/>
-                    <a:lstStyle/>
-                    <a:p>
-                      <a:r>
-                        <a:rPr sz="1100">
-                          <a:solidFill>
-                            <a:srgbClr val="1F2A44"/>
-                          </a:solidFill>
-                        </a:rPr>
-                        <a:t>560 万</a:t>
-                      </a:r>
-                    </a:p>
-                  </a:txBody>
-                  <a:tcPr>
-                    <a:solidFill>
-                      <a:srgbClr val="F5F7FA"/>
-                    </a:solidFill>
-                  </a:tcPr>
-                </a:tc>
-                <a:tc>
-                  <a:txBody>
-                    <a:bodyPr/>
-                    <a:lstStyle/>
-                    <a:p>
-                      <a:r>
-                        <a:rPr sz="1100">
-                          <a:solidFill>
-                            <a:srgbClr val="1F2A44"/>
-                          </a:solidFill>
-                        </a:rPr>
-                        <a:t>240 万</a:t>
-                      </a:r>
-                    </a:p>
-                  </a:txBody>
-                  <a:tcPr>
-                    <a:solidFill>
-                      <a:srgbClr val="F5F7FA"/>
-                    </a:solidFill>
-                  </a:tcPr>
-                </a:tc>
-                <a:tc>
-                  <a:txBody>
-                    <a:bodyPr/>
-                    <a:lstStyle/>
-                    <a:p>
-                      <a:r>
-                        <a:rPr sz="1100">
-                          <a:solidFill>
-                            <a:srgbClr val="1F2A44"/>
-                          </a:solidFill>
-                        </a:rPr>
-                        <a:t>≈ 2,600 万元</a:t>
-                      </a:r>
-                    </a:p>
-                  </a:txBody>
-                  <a:tcPr>
-                    <a:solidFill>
-                      <a:srgbClr val="F5F7FA"/>
-                    </a:solidFill>
-                  </a:tcPr>
-                </a:tc>
-              </a:tr>
-            </a:tbl>
-          </a:graphicData>
-        </a:graphic>
-      </p:graphicFrame>
-      <p:sp>
-        <p:nvSpPr>
-          <p:cNvPr id="4" name="TextBox 3"/>
+              <a:t>P18 我们的承诺（写进协议）</a:t>
+            </a:r>
+          </a:p>
+        </p:txBody>
+      </p:sp>
+      <p:sp>
+        <p:nvSpPr>
+          <p:cNvPr id="3" name="TextBox 2"/>
           <p:cNvSpPr txBox="1"/>
           <p:nvPr/>
         </p:nvSpPr>
         <p:spPr>
           <a:xfrm>
-            <a:off x="548640" y="4206240"/>
-            <a:ext cx="11064240" cy="1280160"/>
+            <a:off x="548640" y="1097280"/>
+            <a:ext cx="11064240" cy="5212080"/>
           </a:xfrm>
           <a:prstGeom prst="rect">
             <a:avLst/>
@@ -7018,21 +7233,81 @@
               <a:spcAft>
                 <a:spcPts val="600"/>
               </a:spcAft>
-              <a:defRPr sz="1400" b="0">
+              <a:defRPr sz="1800" b="0">
                 <a:solidFill>
                   <a:srgbClr val="1F2A44"/>
                 </a:solidFill>
               </a:defRPr>
             </a:pPr>
             <a:r>
-              <a:t>三档测算与 02_测算模型/合作收益测算模型.xlsx 完全一致；可作为月费区间谈判锚点。</a:t>
-            </a:r>
-          </a:p>
-        </p:txBody>
-      </p:sp>
-      <p:sp>
-        <p:nvSpPr>
-          <p:cNvPr id="5" name="TextBox 4"/>
+              <a:t>北欧创新国际会客厅元谷站 12 个月内挂牌运营</a:t>
+            </a:r>
+          </a:p>
+          <a:p>
+            <a:pPr>
+              <a:spcAft>
+                <a:spcPts val="600"/>
+              </a:spcAft>
+              <a:defRPr sz="1800" b="0">
+                <a:solidFill>
+                  <a:srgbClr val="1F2A44"/>
+                </a:solidFill>
+              </a:defRPr>
+            </a:pPr>
+            <a:r>
+              <a:t>仲量联行爬楼数据 90 天内接入合资公司中台</a:t>
+            </a:r>
+          </a:p>
+          <a:p>
+            <a:pPr>
+              <a:spcAft>
+                <a:spcPts val="600"/>
+              </a:spcAft>
+              <a:defRPr sz="1800" b="0">
+                <a:solidFill>
+                  <a:srgbClr val="1F2A44"/>
+                </a:solidFill>
+              </a:defRPr>
+            </a:pPr>
+            <a:r>
+              <a:t>追觅基金 12 个月内完成首期返投落地 ≥3 家潮玩企业</a:t>
+            </a:r>
+          </a:p>
+          <a:p>
+            <a:pPr>
+              <a:spcAft>
+                <a:spcPts val="600"/>
+              </a:spcAft>
+              <a:defRPr sz="1800" b="0">
+                <a:solidFill>
+                  <a:srgbClr val="1F2A44"/>
+                </a:solidFill>
+              </a:defRPr>
+            </a:pPr>
+            <a:r>
+              <a:t>福布斯榜单 / 行业牌照 12 个月内挂牌 ≥2 项</a:t>
+            </a:r>
+          </a:p>
+          <a:p>
+            <a:pPr>
+              <a:spcAft>
+                <a:spcPts val="600"/>
+              </a:spcAft>
+              <a:defRPr sz="1800" b="0">
+                <a:solidFill>
+                  <a:srgbClr val="1F2A44"/>
+                </a:solidFill>
+              </a:defRPr>
+            </a:pPr>
+            <a:r>
+              <a:t>科技开放麦 12 个月内办 ≥10 场</a:t>
+            </a:r>
+          </a:p>
+        </p:txBody>
+      </p:sp>
+      <p:sp>
+        <p:nvSpPr>
+          <p:cNvPr id="4" name="TextBox 3"/>
           <p:cNvSpPr txBox="1"/>
           <p:nvPr/>
         </p:nvSpPr>
@@ -7130,7 +7405,7 @@
               </a:defRPr>
             </a:pPr>
             <a:r>
-              <a:t>P21 下一步行动</a:t>
+              <a:t>P19 我们希望森马的承诺</a:t>
             </a:r>
           </a:p>
         </p:txBody>
@@ -7168,7 +7443,7 @@
               </a:defRPr>
             </a:pPr>
             <a:r>
-              <a:t>本周：双方就月费区间 + 股比锁定意向</a:t>
+              <a:t>授予合资公司独家招商运营权（5 年）</a:t>
             </a:r>
           </a:p>
           <a:p>
@@ -7183,7 +7458,7 @@
               </a:defRPr>
             </a:pPr>
             <a:r>
-              <a:t>次周：签订 MOU（基于本协议草案）</a:t>
+              <a:t>商业可租面积 5.2 万㎡ 招商主导权</a:t>
             </a:r>
           </a:p>
           <a:p>
@@ -7198,7 +7473,7 @@
               </a:defRPr>
             </a:pPr>
             <a:r>
-              <a:t>30 天内：合资公司注册 + 三人核心团队就位</a:t>
+              <a:t>共享配套（直播 / 选品 / 设计中心）由合资公司直营</a:t>
             </a:r>
           </a:p>
           <a:p>
@@ -7213,7 +7488,22 @@
               </a:defRPr>
             </a:pPr>
             <a:r>
-              <a:t>60 天内：北欧会客厅元谷站 + 第一场科技开放麦同步启动</a:t>
+              <a:t>月费保底 + 招商佣金 + 奖项激励 + 股权分红组合</a:t>
+            </a:r>
+          </a:p>
+          <a:p>
+            <a:pPr>
+              <a:spcAft>
+                <a:spcPts val="600"/>
+              </a:spcAft>
+              <a:defRPr sz="1800" b="0">
+                <a:solidFill>
+                  <a:srgbClr val="1F2A44"/>
+                </a:solidFill>
+              </a:defRPr>
+            </a:pPr>
+            <a:r>
+              <a:t>政府关系联合体由森马牵头、合资公司执行</a:t>
             </a:r>
           </a:p>
         </p:txBody>
@@ -7262,6 +7552,909 @@
 </file>
 
 <file path=ppt/slides/slide22.xml><?xml version="1.0" encoding="utf-8"?>
+<p:sld xmlns:a="http://schemas.openxmlformats.org/drawingml/2006/main" xmlns:p="http://schemas.openxmlformats.org/presentationml/2006/main" xmlns:r="http://schemas.openxmlformats.org/officeDocument/2006/relationships">
+  <p:cSld>
+    <p:spTree>
+      <p:nvGrpSpPr>
+        <p:cNvPr id="1" name=""/>
+        <p:cNvGrpSpPr/>
+        <p:nvPr/>
+      </p:nvGrpSpPr>
+      <p:grpSpPr/>
+      <p:sp>
+        <p:nvSpPr>
+          <p:cNvPr id="2" name="Rectangle 1"/>
+          <p:cNvSpPr/>
+          <p:nvPr/>
+        </p:nvSpPr>
+        <p:spPr>
+          <a:xfrm>
+            <a:off x="0" y="0"/>
+            <a:ext cx="12191695" cy="822960"/>
+          </a:xfrm>
+          <a:prstGeom prst="rect">
+            <a:avLst/>
+          </a:prstGeom>
+          <a:solidFill>
+            <a:srgbClr val="142C5E"/>
+          </a:solidFill>
+          <a:ln>
+            <a:noFill/>
+          </a:ln>
+        </p:spPr>
+        <p:style>
+          <a:lnRef idx="1">
+            <a:schemeClr val="accent1"/>
+          </a:lnRef>
+          <a:fillRef idx="3">
+            <a:schemeClr val="accent1"/>
+          </a:fillRef>
+          <a:effectRef idx="2">
+            <a:schemeClr val="accent1"/>
+          </a:effectRef>
+          <a:fontRef idx="minor">
+            <a:schemeClr val="lt1"/>
+          </a:fontRef>
+        </p:style>
+        <p:txBody>
+          <a:bodyPr rtlCol="0" anchor="ctr" lIns="365760" tIns="137160"/>
+          <a:lstStyle/>
+          <a:p>
+            <a:pPr>
+              <a:defRPr sz="2600" b="1">
+                <a:solidFill>
+                  <a:srgbClr val="FFFFFF"/>
+                </a:solidFill>
+              </a:defRPr>
+            </a:pPr>
+            <a:r>
+              <a:t>P20 测算速览（详见 Excel）</a:t>
+            </a:r>
+          </a:p>
+        </p:txBody>
+      </p:sp>
+      <p:graphicFrame>
+        <p:nvGraphicFramePr>
+          <p:cNvPr id="3" name="Table 2"/>
+          <p:cNvGraphicFramePr>
+            <a:graphicFrameLocks noGrp="1"/>
+          </p:cNvGraphicFramePr>
+          <p:nvPr/>
+        </p:nvGraphicFramePr>
+        <p:xfrm>
+          <a:off x="548640" y="1097280"/>
+          <a:ext cx="11064240" cy="1691640"/>
+        </p:xfrm>
+        <a:graphic>
+          <a:graphicData uri="http://schemas.openxmlformats.org/drawingml/2006/table">
+            <a:tbl>
+              <a:tblPr firstRow="1" bandRow="1">
+                <a:tableStyleId>{5C22544A-7EE6-4342-B048-85BDC9FD1C3A}</a:tableStyleId>
+              </a:tblPr>
+              <a:tblGrid>
+                <a:gridCol w="1844040"/>
+                <a:gridCol w="1844040"/>
+                <a:gridCol w="1844040"/>
+                <a:gridCol w="1844040"/>
+                <a:gridCol w="1844040"/>
+                <a:gridCol w="1844040"/>
+              </a:tblGrid>
+              <a:tr h="422910">
+                <a:tc>
+                  <a:txBody>
+                    <a:bodyPr/>
+                    <a:lstStyle/>
+                    <a:p>
+                      <a:r>
+                        <a:rPr b="1" sz="1300">
+                          <a:solidFill>
+                            <a:srgbClr val="FFFFFF"/>
+                          </a:solidFill>
+                        </a:rPr>
+                        <a:t>场景</a:t>
+                      </a:r>
+                    </a:p>
+                  </a:txBody>
+                  <a:tcPr>
+                    <a:solidFill>
+                      <a:srgbClr val="142C5E"/>
+                    </a:solidFill>
+                  </a:tcPr>
+                </a:tc>
+                <a:tc>
+                  <a:txBody>
+                    <a:bodyPr/>
+                    <a:lstStyle/>
+                    <a:p>
+                      <a:r>
+                        <a:rPr b="1" sz="1300">
+                          <a:solidFill>
+                            <a:srgbClr val="FFFFFF"/>
+                          </a:solidFill>
+                        </a:rPr>
+                        <a:t>月费 (年化)</a:t>
+                      </a:r>
+                    </a:p>
+                  </a:txBody>
+                  <a:tcPr>
+                    <a:solidFill>
+                      <a:srgbClr val="142C5E"/>
+                    </a:solidFill>
+                  </a:tcPr>
+                </a:tc>
+                <a:tc>
+                  <a:txBody>
+                    <a:bodyPr/>
+                    <a:lstStyle/>
+                    <a:p>
+                      <a:r>
+                        <a:rPr b="1" sz="1300">
+                          <a:solidFill>
+                            <a:srgbClr val="FFFFFF"/>
+                          </a:solidFill>
+                        </a:rPr>
+                        <a:t>招商佣金</a:t>
+                      </a:r>
+                    </a:p>
+                  </a:txBody>
+                  <a:tcPr>
+                    <a:solidFill>
+                      <a:srgbClr val="142C5E"/>
+                    </a:solidFill>
+                  </a:tcPr>
+                </a:tc>
+                <a:tc>
+                  <a:txBody>
+                    <a:bodyPr/>
+                    <a:lstStyle/>
+                    <a:p>
+                      <a:r>
+                        <a:rPr b="1" sz="1300">
+                          <a:solidFill>
+                            <a:srgbClr val="FFFFFF"/>
+                          </a:solidFill>
+                        </a:rPr>
+                        <a:t>活动+奖项</a:t>
+                      </a:r>
+                    </a:p>
+                  </a:txBody>
+                  <a:tcPr>
+                    <a:solidFill>
+                      <a:srgbClr val="142C5E"/>
+                    </a:solidFill>
+                  </a:tcPr>
+                </a:tc>
+                <a:tc>
+                  <a:txBody>
+                    <a:bodyPr/>
+                    <a:lstStyle/>
+                    <a:p>
+                      <a:r>
+                        <a:rPr b="1" sz="1300">
+                          <a:solidFill>
+                            <a:srgbClr val="FFFFFF"/>
+                          </a:solidFill>
+                        </a:rPr>
+                        <a:t>分红 (含服务中心)</a:t>
+                      </a:r>
+                    </a:p>
+                  </a:txBody>
+                  <a:tcPr>
+                    <a:solidFill>
+                      <a:srgbClr val="142C5E"/>
+                    </a:solidFill>
+                  </a:tcPr>
+                </a:tc>
+                <a:tc>
+                  <a:txBody>
+                    <a:bodyPr/>
+                    <a:lstStyle/>
+                    <a:p>
+                      <a:r>
+                        <a:rPr b="1" sz="1300">
+                          <a:solidFill>
+                            <a:srgbClr val="FFFFFF"/>
+                          </a:solidFill>
+                        </a:rPr>
+                        <a:t>首年合计 (胡教授团队)</a:t>
+                      </a:r>
+                    </a:p>
+                  </a:txBody>
+                  <a:tcPr>
+                    <a:solidFill>
+                      <a:srgbClr val="142C5E"/>
+                    </a:solidFill>
+                  </a:tcPr>
+                </a:tc>
+              </a:tr>
+              <a:tr h="422910">
+                <a:tc>
+                  <a:txBody>
+                    <a:bodyPr/>
+                    <a:lstStyle/>
+                    <a:p>
+                      <a:r>
+                        <a:rPr sz="1100">
+                          <a:solidFill>
+                            <a:srgbClr val="1F2A44"/>
+                          </a:solidFill>
+                        </a:rPr>
+                        <a:t>保守</a:t>
+                      </a:r>
+                    </a:p>
+                  </a:txBody>
+                  <a:tcPr>
+                    <a:solidFill>
+                      <a:srgbClr val="F5F7FA"/>
+                    </a:solidFill>
+                  </a:tcPr>
+                </a:tc>
+                <a:tc>
+                  <a:txBody>
+                    <a:bodyPr/>
+                    <a:lstStyle/>
+                    <a:p>
+                      <a:r>
+                        <a:rPr sz="1100">
+                          <a:solidFill>
+                            <a:srgbClr val="1F2A44"/>
+                          </a:solidFill>
+                        </a:rPr>
+                        <a:t>240 万</a:t>
+                      </a:r>
+                    </a:p>
+                  </a:txBody>
+                  <a:tcPr>
+                    <a:solidFill>
+                      <a:srgbClr val="F5F7FA"/>
+                    </a:solidFill>
+                  </a:tcPr>
+                </a:tc>
+                <a:tc>
+                  <a:txBody>
+                    <a:bodyPr/>
+                    <a:lstStyle/>
+                    <a:p>
+                      <a:r>
+                        <a:rPr sz="1100">
+                          <a:solidFill>
+                            <a:srgbClr val="1F2A44"/>
+                          </a:solidFill>
+                        </a:rPr>
+                        <a:t>72 万</a:t>
+                      </a:r>
+                    </a:p>
+                  </a:txBody>
+                  <a:tcPr>
+                    <a:solidFill>
+                      <a:srgbClr val="F5F7FA"/>
+                    </a:solidFill>
+                  </a:tcPr>
+                </a:tc>
+                <a:tc>
+                  <a:txBody>
+                    <a:bodyPr/>
+                    <a:lstStyle/>
+                    <a:p>
+                      <a:r>
+                        <a:rPr sz="1100">
+                          <a:solidFill>
+                            <a:srgbClr val="1F2A44"/>
+                          </a:solidFill>
+                        </a:rPr>
+                        <a:t>240 万</a:t>
+                      </a:r>
+                    </a:p>
+                  </a:txBody>
+                  <a:tcPr>
+                    <a:solidFill>
+                      <a:srgbClr val="F5F7FA"/>
+                    </a:solidFill>
+                  </a:tcPr>
+                </a:tc>
+                <a:tc>
+                  <a:txBody>
+                    <a:bodyPr/>
+                    <a:lstStyle/>
+                    <a:p>
+                      <a:r>
+                        <a:rPr sz="1100">
+                          <a:solidFill>
+                            <a:srgbClr val="1F2A44"/>
+                          </a:solidFill>
+                        </a:rPr>
+                        <a:t>72 万</a:t>
+                      </a:r>
+                    </a:p>
+                  </a:txBody>
+                  <a:tcPr>
+                    <a:solidFill>
+                      <a:srgbClr val="F5F7FA"/>
+                    </a:solidFill>
+                  </a:tcPr>
+                </a:tc>
+                <a:tc>
+                  <a:txBody>
+                    <a:bodyPr/>
+                    <a:lstStyle/>
+                    <a:p>
+                      <a:r>
+                        <a:rPr sz="1100">
+                          <a:solidFill>
+                            <a:srgbClr val="1F2A44"/>
+                          </a:solidFill>
+                        </a:rPr>
+                        <a:t>≈ 624 万元</a:t>
+                      </a:r>
+                    </a:p>
+                  </a:txBody>
+                  <a:tcPr>
+                    <a:solidFill>
+                      <a:srgbClr val="F5F7FA"/>
+                    </a:solidFill>
+                  </a:tcPr>
+                </a:tc>
+              </a:tr>
+              <a:tr h="422910">
+                <a:tc>
+                  <a:txBody>
+                    <a:bodyPr/>
+                    <a:lstStyle/>
+                    <a:p>
+                      <a:r>
+                        <a:rPr sz="1100">
+                          <a:solidFill>
+                            <a:srgbClr val="1F2A44"/>
+                          </a:solidFill>
+                        </a:rPr>
+                        <a:t>基础</a:t>
+                      </a:r>
+                    </a:p>
+                  </a:txBody>
+                  <a:tcPr>
+                    <a:solidFill>
+                      <a:srgbClr val="FFFFFF"/>
+                    </a:solidFill>
+                  </a:tcPr>
+                </a:tc>
+                <a:tc>
+                  <a:txBody>
+                    <a:bodyPr/>
+                    <a:lstStyle/>
+                    <a:p>
+                      <a:r>
+                        <a:rPr sz="1100">
+                          <a:solidFill>
+                            <a:srgbClr val="1F2A44"/>
+                          </a:solidFill>
+                        </a:rPr>
+                        <a:t>336 万</a:t>
+                      </a:r>
+                    </a:p>
+                  </a:txBody>
+                  <a:tcPr>
+                    <a:solidFill>
+                      <a:srgbClr val="FFFFFF"/>
+                    </a:solidFill>
+                  </a:tcPr>
+                </a:tc>
+                <a:tc>
+                  <a:txBody>
+                    <a:bodyPr/>
+                    <a:lstStyle/>
+                    <a:p>
+                      <a:r>
+                        <a:rPr sz="1100">
+                          <a:solidFill>
+                            <a:srgbClr val="1F2A44"/>
+                          </a:solidFill>
+                        </a:rPr>
+                        <a:t>132 万</a:t>
+                      </a:r>
+                    </a:p>
+                  </a:txBody>
+                  <a:tcPr>
+                    <a:solidFill>
+                      <a:srgbClr val="FFFFFF"/>
+                    </a:solidFill>
+                  </a:tcPr>
+                </a:tc>
+                <a:tc>
+                  <a:txBody>
+                    <a:bodyPr/>
+                    <a:lstStyle/>
+                    <a:p>
+                      <a:r>
+                        <a:rPr sz="1100">
+                          <a:solidFill>
+                            <a:srgbClr val="1F2A44"/>
+                          </a:solidFill>
+                        </a:rPr>
+                        <a:t>390 万</a:t>
+                      </a:r>
+                    </a:p>
+                  </a:txBody>
+                  <a:tcPr>
+                    <a:solidFill>
+                      <a:srgbClr val="FFFFFF"/>
+                    </a:solidFill>
+                  </a:tcPr>
+                </a:tc>
+                <a:tc>
+                  <a:txBody>
+                    <a:bodyPr/>
+                    <a:lstStyle/>
+                    <a:p>
+                      <a:r>
+                        <a:rPr sz="1100">
+                          <a:solidFill>
+                            <a:srgbClr val="1F2A44"/>
+                          </a:solidFill>
+                        </a:rPr>
+                        <a:t>144 万</a:t>
+                      </a:r>
+                    </a:p>
+                  </a:txBody>
+                  <a:tcPr>
+                    <a:solidFill>
+                      <a:srgbClr val="FFFFFF"/>
+                    </a:solidFill>
+                  </a:tcPr>
+                </a:tc>
+                <a:tc>
+                  <a:txBody>
+                    <a:bodyPr/>
+                    <a:lstStyle/>
+                    <a:p>
+                      <a:r>
+                        <a:rPr sz="1100">
+                          <a:solidFill>
+                            <a:srgbClr val="1F2A44"/>
+                          </a:solidFill>
+                        </a:rPr>
+                        <a:t>≈ 1,002 万元</a:t>
+                      </a:r>
+                    </a:p>
+                  </a:txBody>
+                  <a:tcPr>
+                    <a:solidFill>
+                      <a:srgbClr val="FFFFFF"/>
+                    </a:solidFill>
+                  </a:tcPr>
+                </a:tc>
+              </a:tr>
+              <a:tr h="422910">
+                <a:tc>
+                  <a:txBody>
+                    <a:bodyPr/>
+                    <a:lstStyle/>
+                    <a:p>
+                      <a:r>
+                        <a:rPr sz="1100">
+                          <a:solidFill>
+                            <a:srgbClr val="1F2A44"/>
+                          </a:solidFill>
+                        </a:rPr>
+                        <a:t>乐观</a:t>
+                      </a:r>
+                    </a:p>
+                  </a:txBody>
+                  <a:tcPr>
+                    <a:solidFill>
+                      <a:srgbClr val="F5F7FA"/>
+                    </a:solidFill>
+                  </a:tcPr>
+                </a:tc>
+                <a:tc>
+                  <a:txBody>
+                    <a:bodyPr/>
+                    <a:lstStyle/>
+                    <a:p>
+                      <a:r>
+                        <a:rPr sz="1100">
+                          <a:solidFill>
+                            <a:srgbClr val="1F2A44"/>
+                          </a:solidFill>
+                        </a:rPr>
+                        <a:t>420 万</a:t>
+                      </a:r>
+                    </a:p>
+                  </a:txBody>
+                  <a:tcPr>
+                    <a:solidFill>
+                      <a:srgbClr val="F5F7FA"/>
+                    </a:solidFill>
+                  </a:tcPr>
+                </a:tc>
+                <a:tc>
+                  <a:txBody>
+                    <a:bodyPr/>
+                    <a:lstStyle/>
+                    <a:p>
+                      <a:r>
+                        <a:rPr sz="1100">
+                          <a:solidFill>
+                            <a:srgbClr val="1F2A44"/>
+                          </a:solidFill>
+                        </a:rPr>
+                        <a:t>264 万</a:t>
+                      </a:r>
+                    </a:p>
+                  </a:txBody>
+                  <a:tcPr>
+                    <a:solidFill>
+                      <a:srgbClr val="F5F7FA"/>
+                    </a:solidFill>
+                  </a:tcPr>
+                </a:tc>
+                <a:tc>
+                  <a:txBody>
+                    <a:bodyPr/>
+                    <a:lstStyle/>
+                    <a:p>
+                      <a:r>
+                        <a:rPr sz="1100">
+                          <a:solidFill>
+                            <a:srgbClr val="1F2A44"/>
+                          </a:solidFill>
+                        </a:rPr>
+                        <a:t>560 万</a:t>
+                      </a:r>
+                    </a:p>
+                  </a:txBody>
+                  <a:tcPr>
+                    <a:solidFill>
+                      <a:srgbClr val="F5F7FA"/>
+                    </a:solidFill>
+                  </a:tcPr>
+                </a:tc>
+                <a:tc>
+                  <a:txBody>
+                    <a:bodyPr/>
+                    <a:lstStyle/>
+                    <a:p>
+                      <a:r>
+                        <a:rPr sz="1100">
+                          <a:solidFill>
+                            <a:srgbClr val="1F2A44"/>
+                          </a:solidFill>
+                        </a:rPr>
+                        <a:t>288 万</a:t>
+                      </a:r>
+                    </a:p>
+                  </a:txBody>
+                  <a:tcPr>
+                    <a:solidFill>
+                      <a:srgbClr val="F5F7FA"/>
+                    </a:solidFill>
+                  </a:tcPr>
+                </a:tc>
+                <a:tc>
+                  <a:txBody>
+                    <a:bodyPr/>
+                    <a:lstStyle/>
+                    <a:p>
+                      <a:r>
+                        <a:rPr sz="1100">
+                          <a:solidFill>
+                            <a:srgbClr val="1F2A44"/>
+                          </a:solidFill>
+                        </a:rPr>
+                        <a:t>≈ 1,532 万元</a:t>
+                      </a:r>
+                    </a:p>
+                  </a:txBody>
+                  <a:tcPr>
+                    <a:solidFill>
+                      <a:srgbClr val="F5F7FA"/>
+                    </a:solidFill>
+                  </a:tcPr>
+                </a:tc>
+              </a:tr>
+            </a:tbl>
+          </a:graphicData>
+        </a:graphic>
+      </p:graphicFrame>
+      <p:sp>
+        <p:nvSpPr>
+          <p:cNvPr id="4" name="TextBox 3"/>
+          <p:cNvSpPr txBox="1"/>
+          <p:nvPr/>
+        </p:nvSpPr>
+        <p:spPr>
+          <a:xfrm>
+            <a:off x="548640" y="4023360"/>
+            <a:ext cx="11064240" cy="2194560"/>
+          </a:xfrm>
+          <a:prstGeom prst="rect">
+            <a:avLst/>
+          </a:prstGeom>
+          <a:noFill/>
+        </p:spPr>
+        <p:txBody>
+          <a:bodyPr wrap="square">
+            <a:spAutoFit/>
+          </a:bodyPr>
+          <a:lstStyle/>
+          <a:p>
+            <a:pPr>
+              <a:spcAft>
+                <a:spcPts val="600"/>
+              </a:spcAft>
+              <a:defRPr sz="1300" b="0">
+                <a:solidFill>
+                  <a:srgbClr val="1F2A44"/>
+                </a:solidFill>
+              </a:defRPr>
+            </a:pPr>
+            <a:r>
+              <a:t>另:合资公司层面新增「科技企业服务中心」首年营收 150 / 300 / 640 万元 (Sheet 05b)</a:t>
+            </a:r>
+          </a:p>
+          <a:p>
+            <a:pPr lvl="1">
+              <a:spcAft>
+                <a:spcPts val="600"/>
+              </a:spcAft>
+              <a:defRPr sz="1100" b="0">
+                <a:solidFill>
+                  <a:srgbClr val="55607A"/>
+                </a:solidFill>
+              </a:defRPr>
+            </a:pPr>
+            <a:r>
+              <a:t>其 38% 净利已通过分红 30% 反映在上表第 5 列, 不重复计入合计</a:t>
+            </a:r>
+          </a:p>
+          <a:p>
+            <a:pPr>
+              <a:spcAft>
+                <a:spcPts val="600"/>
+              </a:spcAft>
+              <a:defRPr sz="1300" b="0">
+                <a:solidFill>
+                  <a:srgbClr val="1F2A44"/>
+                </a:solidFill>
+              </a:defRPr>
+            </a:pPr>
+            <a:r>
+              <a:t>v1.1 已按真实市场租金 (1.8-2.5 元/㎡/天) 矫正; 详见 02_测算模型/合作收益测算模型.xlsx</a:t>
+            </a:r>
+          </a:p>
+        </p:txBody>
+      </p:sp>
+      <p:sp>
+        <p:nvSpPr>
+          <p:cNvPr id="5" name="TextBox 4"/>
+          <p:cNvSpPr txBox="1"/>
+          <p:nvPr/>
+        </p:nvSpPr>
+        <p:spPr>
+          <a:xfrm>
+            <a:off x="365760" y="6400800"/>
+            <a:ext cx="11430000" cy="365760"/>
+          </a:xfrm>
+          <a:prstGeom prst="rect">
+            <a:avLst/>
+          </a:prstGeom>
+          <a:noFill/>
+        </p:spPr>
+        <p:txBody>
+          <a:bodyPr wrap="none">
+            <a:spAutoFit/>
+          </a:bodyPr>
+          <a:lstStyle/>
+          <a:p>
+            <a:pPr>
+              <a:defRPr sz="1000">
+                <a:solidFill>
+                  <a:srgbClr val="55607A"/>
+                </a:solidFill>
+              </a:defRPr>
+            </a:pPr>
+            <a:r>
+              <a:t>胡教授团队 × 森马集团 · 元谷项目联合运营方案</a:t>
+            </a:r>
+          </a:p>
+        </p:txBody>
+      </p:sp>
+    </p:spTree>
+  </p:cSld>
+  <p:clrMapOvr>
+    <a:masterClrMapping/>
+  </p:clrMapOvr>
+</p:sld>
+</file>
+
+<file path=ppt/slides/slide23.xml><?xml version="1.0" encoding="utf-8"?>
+<p:sld xmlns:a="http://schemas.openxmlformats.org/drawingml/2006/main" xmlns:p="http://schemas.openxmlformats.org/presentationml/2006/main" xmlns:r="http://schemas.openxmlformats.org/officeDocument/2006/relationships">
+  <p:cSld>
+    <p:spTree>
+      <p:nvGrpSpPr>
+        <p:cNvPr id="1" name=""/>
+        <p:cNvGrpSpPr/>
+        <p:nvPr/>
+      </p:nvGrpSpPr>
+      <p:grpSpPr/>
+      <p:sp>
+        <p:nvSpPr>
+          <p:cNvPr id="2" name="Rectangle 1"/>
+          <p:cNvSpPr/>
+          <p:nvPr/>
+        </p:nvSpPr>
+        <p:spPr>
+          <a:xfrm>
+            <a:off x="0" y="0"/>
+            <a:ext cx="12191695" cy="822960"/>
+          </a:xfrm>
+          <a:prstGeom prst="rect">
+            <a:avLst/>
+          </a:prstGeom>
+          <a:solidFill>
+            <a:srgbClr val="142C5E"/>
+          </a:solidFill>
+          <a:ln>
+            <a:noFill/>
+          </a:ln>
+        </p:spPr>
+        <p:style>
+          <a:lnRef idx="1">
+            <a:schemeClr val="accent1"/>
+          </a:lnRef>
+          <a:fillRef idx="3">
+            <a:schemeClr val="accent1"/>
+          </a:fillRef>
+          <a:effectRef idx="2">
+            <a:schemeClr val="accent1"/>
+          </a:effectRef>
+          <a:fontRef idx="minor">
+            <a:schemeClr val="lt1"/>
+          </a:fontRef>
+        </p:style>
+        <p:txBody>
+          <a:bodyPr rtlCol="0" anchor="ctr" lIns="365760" tIns="137160"/>
+          <a:lstStyle/>
+          <a:p>
+            <a:pPr>
+              <a:defRPr sz="2600" b="1">
+                <a:solidFill>
+                  <a:srgbClr val="FFFFFF"/>
+                </a:solidFill>
+              </a:defRPr>
+            </a:pPr>
+            <a:r>
+              <a:t>P21 下一步行动</a:t>
+            </a:r>
+          </a:p>
+        </p:txBody>
+      </p:sp>
+      <p:sp>
+        <p:nvSpPr>
+          <p:cNvPr id="3" name="TextBox 2"/>
+          <p:cNvSpPr txBox="1"/>
+          <p:nvPr/>
+        </p:nvSpPr>
+        <p:spPr>
+          <a:xfrm>
+            <a:off x="548640" y="1097280"/>
+            <a:ext cx="11064240" cy="5212080"/>
+          </a:xfrm>
+          <a:prstGeom prst="rect">
+            <a:avLst/>
+          </a:prstGeom>
+          <a:noFill/>
+        </p:spPr>
+        <p:txBody>
+          <a:bodyPr wrap="square">
+            <a:spAutoFit/>
+          </a:bodyPr>
+          <a:lstStyle/>
+          <a:p>
+            <a:pPr>
+              <a:spcAft>
+                <a:spcPts val="600"/>
+              </a:spcAft>
+              <a:defRPr sz="1800" b="0">
+                <a:solidFill>
+                  <a:srgbClr val="1F2A44"/>
+                </a:solidFill>
+              </a:defRPr>
+            </a:pPr>
+            <a:r>
+              <a:t>本周：双方就月费区间 + 股比锁定意向</a:t>
+            </a:r>
+          </a:p>
+          <a:p>
+            <a:pPr>
+              <a:spcAft>
+                <a:spcPts val="600"/>
+              </a:spcAft>
+              <a:defRPr sz="1800" b="0">
+                <a:solidFill>
+                  <a:srgbClr val="1F2A44"/>
+                </a:solidFill>
+              </a:defRPr>
+            </a:pPr>
+            <a:r>
+              <a:t>次周：签订 MOU（基于本协议草案）</a:t>
+            </a:r>
+          </a:p>
+          <a:p>
+            <a:pPr>
+              <a:spcAft>
+                <a:spcPts val="600"/>
+              </a:spcAft>
+              <a:defRPr sz="1800" b="0">
+                <a:solidFill>
+                  <a:srgbClr val="1F2A44"/>
+                </a:solidFill>
+              </a:defRPr>
+            </a:pPr>
+            <a:r>
+              <a:t>30 天内：合资公司注册 + 三人核心团队就位</a:t>
+            </a:r>
+          </a:p>
+          <a:p>
+            <a:pPr>
+              <a:spcAft>
+                <a:spcPts val="600"/>
+              </a:spcAft>
+              <a:defRPr sz="1800" b="0">
+                <a:solidFill>
+                  <a:srgbClr val="1F2A44"/>
+                </a:solidFill>
+              </a:defRPr>
+            </a:pPr>
+            <a:r>
+              <a:t>60 天内：北欧会客厅元谷站 + 第一场科技开放麦同步启动</a:t>
+            </a:r>
+          </a:p>
+        </p:txBody>
+      </p:sp>
+      <p:sp>
+        <p:nvSpPr>
+          <p:cNvPr id="4" name="TextBox 3"/>
+          <p:cNvSpPr txBox="1"/>
+          <p:nvPr/>
+        </p:nvSpPr>
+        <p:spPr>
+          <a:xfrm>
+            <a:off x="365760" y="6400800"/>
+            <a:ext cx="11430000" cy="365760"/>
+          </a:xfrm>
+          <a:prstGeom prst="rect">
+            <a:avLst/>
+          </a:prstGeom>
+          <a:noFill/>
+        </p:spPr>
+        <p:txBody>
+          <a:bodyPr wrap="none">
+            <a:spAutoFit/>
+          </a:bodyPr>
+          <a:lstStyle/>
+          <a:p>
+            <a:pPr>
+              <a:defRPr sz="1000">
+                <a:solidFill>
+                  <a:srgbClr val="55607A"/>
+                </a:solidFill>
+              </a:defRPr>
+            </a:pPr>
+            <a:r>
+              <a:t>胡教授团队 × 森马集团 · 元谷项目联合运营方案</a:t>
+            </a:r>
+          </a:p>
+        </p:txBody>
+      </p:sp>
+    </p:spTree>
+  </p:cSld>
+  <p:clrMapOvr>
+    <a:masterClrMapping/>
+  </p:clrMapOvr>
+</p:sld>
+</file>
+
+<file path=ppt/slides/slide24.xml><?xml version="1.0" encoding="utf-8"?>
 <p:sld xmlns:a="http://schemas.openxmlformats.org/drawingml/2006/main" xmlns:p="http://schemas.openxmlformats.org/presentationml/2006/main" xmlns:r="http://schemas.openxmlformats.org/officeDocument/2006/relationships">
   <p:cSld>
     <p:spTree>
